--- a/lecture_pptx/out/s15/ワーク01_講師用.pptx
+++ b/lecture_pptx/out/s15/ワーク01_講師用.pptx
@@ -1106,7 +1106,7 @@
                 <a:ea typeface="Yu Gothic UI Semibold" pitchFamily="34" charset="-122"/>
                 <a:cs typeface="Yu Gothic UI Semibold" pitchFamily="34" charset="-120"/>
               </a:rPr>
-              <a:t>引受基準の整理と AI 落とし込み</a:t>
+              <a:t>散在ナレッジを "引受判定マスタ表" に統合する</a:t>
             </a:r>
             <a:endParaRPr lang="en-US" sz="3800" dirty="0"/>
           </a:p>
@@ -1145,7 +1145,7 @@
                 <a:ea typeface="Yu Gothic UI" pitchFamily="34" charset="-122"/>
                 <a:cs typeface="Yu Gothic UI" pitchFamily="34" charset="-120"/>
               </a:rPr>
-              <a:t>属人化した判断を「型」にして、新人も判断できる土台を作る</a:t>
+              <a:t>口伝・チャット・旧文書に散らばる判定ルールを、AIが読める1つの表に統合し、更新できる形にする</a:t>
             </a:r>
             <a:endParaRPr lang="en-US" sz="1900" dirty="0"/>
           </a:p>
@@ -1275,7 +1275,7 @@
                 <a:ea typeface="Yu Gothic UI Semibold" pitchFamily="34" charset="-122"/>
                 <a:cs typeface="Yu Gothic UI Semibold" pitchFamily="34" charset="-120"/>
               </a:rPr>
-              <a:t>演習1 引受基準を3段階で整理 — 解答・指導ポイント</a:t>
+              <a:t>演習1 散在ナレッジを「マスタ表」10列に整理する — 解答・指導ポイント</a:t>
             </a:r>
             <a:endParaRPr lang="en-US" sz="2600" dirty="0"/>
           </a:p>
@@ -1442,107 +1442,136 @@
                 <a:ea typeface="Yu Gothic UI" pitchFamily="34" charset="-122"/>
                 <a:cs typeface="Yu Gothic UI" pitchFamily="34" charset="-120"/>
               </a:rPr>
-              <a:t>【貼り付け用】</a:t>
-            </a:r>
-            <a:endParaRPr lang="en-US" sz="1400" dirty="0"/>
-          </a:p>
-          <a:p>
-            <a:pPr indent="0" marL="0">
-              <a:spcAft>
-                <a:spcPts val="400"/>
-              </a:spcAft>
-              <a:buNone/>
-            </a:pPr>
-            <a:r>
-              <a:rPr lang="en-US" sz="1400" dirty="0">
-                <a:solidFill>
-                  <a:srgbClr val="1A1A1A"/>
-                </a:solidFill>
-                <a:latin typeface="Yu Gothic UI" pitchFamily="34" charset="0"/>
-                <a:ea typeface="Yu Gothic UI" pitchFamily="34" charset="-122"/>
-                <a:cs typeface="Yu Gothic UI" pitchFamily="34" charset="-120"/>
-              </a:rPr>
-              <a:t>保険引受で頻出する20シーンを YES/NO/要確認 に分類して。</a:t>
-            </a:r>
-            <a:endParaRPr lang="en-US" sz="1400" dirty="0"/>
-          </a:p>
-          <a:p>
-            <a:pPr indent="0" marL="0">
-              <a:spcAft>
-                <a:spcPts val="400"/>
-              </a:spcAft>
-              <a:buNone/>
-            </a:pPr>
-            <a:r>
-              <a:rPr lang="en-US" sz="1400" dirty="0">
-                <a:solidFill>
-                  <a:srgbClr val="1A1A1A"/>
-                </a:solidFill>
-                <a:latin typeface="Yu Gothic UI" pitchFamily="34" charset="0"/>
-                <a:ea typeface="Yu Gothic UI" pitchFamily="34" charset="-122"/>
-                <a:cs typeface="Yu Gothic UI" pitchFamily="34" charset="-120"/>
-              </a:rPr>
-              <a:t>・各シーン: 年齢+健康状態+加入希望商品 のパターン</a:t>
-            </a:r>
-            <a:endParaRPr lang="en-US" sz="1400" dirty="0"/>
-          </a:p>
-          <a:p>
-            <a:pPr indent="0" marL="0">
-              <a:spcAft>
-                <a:spcPts val="400"/>
-              </a:spcAft>
-              <a:buNone/>
-            </a:pPr>
-            <a:r>
-              <a:rPr lang="en-US" sz="1400" dirty="0">
-                <a:solidFill>
-                  <a:srgbClr val="1A1A1A"/>
-                </a:solidFill>
-                <a:latin typeface="Yu Gothic UI" pitchFamily="34" charset="0"/>
-                <a:ea typeface="Yu Gothic UI" pitchFamily="34" charset="-122"/>
-                <a:cs typeface="Yu Gothic UI" pitchFamily="34" charset="-120"/>
-              </a:rPr>
-              <a:t>・判定理由を1行で</a:t>
-            </a:r>
-            <a:endParaRPr lang="en-US" sz="1400" dirty="0"/>
-          </a:p>
-          <a:p>
-            <a:pPr indent="0" marL="0">
-              <a:spcAft>
-                <a:spcPts val="400"/>
-              </a:spcAft>
-              <a:buNone/>
-            </a:pPr>
-            <a:r>
-              <a:rPr lang="en-US" sz="1400" dirty="0">
-                <a:solidFill>
-                  <a:srgbClr val="1A1A1A"/>
-                </a:solidFill>
-                <a:latin typeface="Yu Gothic UI" pitchFamily="34" charset="0"/>
-                <a:ea typeface="Yu Gothic UI" pitchFamily="34" charset="-122"/>
-                <a:cs typeface="Yu Gothic UI" pitchFamily="34" charset="-120"/>
-              </a:rPr>
-              <a:t>・要確認の場合のエスカレーション先(担当部署)も</a:t>
-            </a:r>
-            <a:endParaRPr lang="en-US" sz="1400" dirty="0"/>
-          </a:p>
-          <a:p>
-            <a:pPr indent="0" marL="0">
-              <a:spcAft>
-                <a:spcPts val="400"/>
-              </a:spcAft>
-              <a:buNone/>
-            </a:pPr>
-            <a:r>
-              <a:rPr lang="en-US" sz="1400" dirty="0">
-                <a:solidFill>
-                  <a:srgbClr val="1A1A1A"/>
-                </a:solidFill>
-                <a:latin typeface="Yu Gothic UI" pitchFamily="34" charset="0"/>
-                <a:ea typeface="Yu Gothic UI" pitchFamily="34" charset="-122"/>
-                <a:cs typeface="Yu Gothic UI" pitchFamily="34" charset="-120"/>
-              </a:rPr>
-              <a:t>・社内ルール: ●●●(分かる範囲で)</a:t>
+              <a:t>【生徒への声かけ例】</a:t>
+            </a:r>
+            <a:endParaRPr lang="en-US" sz="1400" dirty="0"/>
+          </a:p>
+          <a:p>
+            <a:pPr indent="0" marL="0">
+              <a:spcAft>
+                <a:spcPts val="400"/>
+              </a:spcAft>
+              <a:buNone/>
+            </a:pPr>
+            <a:r>
+              <a:rPr lang="en-US" sz="1400" dirty="0">
+                <a:solidFill>
+                  <a:srgbClr val="1A1A1A"/>
+                </a:solidFill>
+                <a:latin typeface="Yu Gothic UI" pitchFamily="34" charset="0"/>
+                <a:ea typeface="Yu Gothic UI" pitchFamily="34" charset="-122"/>
+                <a:cs typeface="Yu Gothic UI" pitchFamily="34" charset="-120"/>
+              </a:rPr>
+              <a:t>・「デモナレッジ01の口伝メモを読んで、まず1件だけマスタ表に入れてみて」</a:t>
+            </a:r>
+            <a:endParaRPr lang="en-US" sz="1400" dirty="0"/>
+          </a:p>
+          <a:p>
+            <a:pPr indent="0" marL="0">
+              <a:spcAft>
+                <a:spcPts val="400"/>
+              </a:spcAft>
+              <a:buNone/>
+            </a:pPr>
+            <a:r>
+              <a:rPr lang="en-US" sz="1400" dirty="0">
+                <a:solidFill>
+                  <a:srgbClr val="1A1A1A"/>
+                </a:solidFill>
+                <a:latin typeface="Yu Gothic UI" pitchFamily="34" charset="0"/>
+                <a:ea typeface="Yu Gothic UI" pitchFamily="34" charset="-122"/>
+                <a:cs typeface="Yu Gothic UI" pitchFamily="34" charset="-120"/>
+              </a:rPr>
+              <a:t>・「デモナレッジ02(Slack)と03(旧マニュアル)で "同じ条件" 見つかった?一つに統合して」</a:t>
+            </a:r>
+            <a:endParaRPr lang="en-US" sz="1400" dirty="0"/>
+          </a:p>
+          <a:p>
+            <a:pPr indent="0" marL="0">
+              <a:spcAft>
+                <a:spcPts val="400"/>
+              </a:spcAft>
+              <a:buNone/>
+            </a:pPr>
+            <a:r>
+              <a:rPr lang="en-US" sz="1400" dirty="0">
+                <a:solidFill>
+                  <a:srgbClr val="1A1A1A"/>
+                </a:solidFill>
+                <a:latin typeface="Yu Gothic UI" pitchFamily="34" charset="0"/>
+                <a:ea typeface="Yu Gothic UI" pitchFamily="34" charset="-122"/>
+                <a:cs typeface="Yu Gothic UI" pitchFamily="34" charset="-120"/>
+              </a:rPr>
+              <a:t>・「根拠列に "田中課長談(2024年Slack)" と書いておけば、後で確認できる」</a:t>
+            </a:r>
+            <a:endParaRPr lang="en-US" sz="1400" dirty="0"/>
+          </a:p>
+          <a:p>
+            <a:pPr indent="0" marL="0">
+              <a:spcAft>
+                <a:spcPts val="400"/>
+              </a:spcAft>
+              <a:buNone/>
+            </a:pPr>
+            <a:endParaRPr lang="en-US" sz="1400" dirty="0"/>
+          </a:p>
+          <a:p>
+            <a:pPr indent="0" marL="0">
+              <a:spcAft>
+                <a:spcPts val="400"/>
+              </a:spcAft>
+              <a:buNone/>
+            </a:pPr>
+            <a:r>
+              <a:rPr lang="en-US" sz="1400" dirty="0">
+                <a:solidFill>
+                  <a:srgbClr val="1A1A1A"/>
+                </a:solidFill>
+                <a:latin typeface="Yu Gothic UI" pitchFamily="34" charset="0"/>
+                <a:ea typeface="Yu Gothic UI" pitchFamily="34" charset="-122"/>
+                <a:cs typeface="Yu Gothic UI" pitchFamily="34" charset="-120"/>
+              </a:rPr>
+              <a:t>【生徒が Gemini に投げる相談例(素材ごと丸投げでOK)】</a:t>
+            </a:r>
+            <a:endParaRPr lang="en-US" sz="1400" dirty="0"/>
+          </a:p>
+          <a:p>
+            <a:pPr indent="0" marL="0">
+              <a:spcAft>
+                <a:spcPts val="400"/>
+              </a:spcAft>
+              <a:buNone/>
+            </a:pPr>
+            <a:r>
+              <a:rPr lang="en-US" sz="1400" dirty="0">
+                <a:solidFill>
+                  <a:srgbClr val="1A1A1A"/>
+                </a:solidFill>
+                <a:latin typeface="Yu Gothic UI" pitchFamily="34" charset="0"/>
+                <a:ea typeface="Yu Gothic UI" pitchFamily="34" charset="-122"/>
+                <a:cs typeface="Yu Gothic UI" pitchFamily="34" charset="-120"/>
+              </a:rPr>
+              <a:t>「以下のメモから引受判定条件を抽出して、10列のマスタ表(条件ID/カテゴリ/対象商品/条件詳細/判定/理由/追加確認/エスカレ先/根拠/更新日)にJSONで整理して。</a:t>
+            </a:r>
+            <a:endParaRPr lang="en-US" sz="1400" dirty="0"/>
+          </a:p>
+          <a:p>
+            <a:pPr indent="0" marL="0">
+              <a:spcAft>
+                <a:spcPts val="400"/>
+              </a:spcAft>
+              <a:buNone/>
+            </a:pPr>
+            <a:r>
+              <a:rPr lang="en-US" sz="1400" dirty="0">
+                <a:solidFill>
+                  <a:srgbClr val="1A1A1A"/>
+                </a:solidFill>
+                <a:latin typeface="Yu Gothic UI" pitchFamily="34" charset="0"/>
+                <a:ea typeface="Yu Gothic UI" pitchFamily="34" charset="-122"/>
+                <a:cs typeface="Yu Gothic UI" pitchFamily="34" charset="-120"/>
+              </a:rPr>
+              <a:t>[デモナレッジ01の本文を貼付]」</a:t>
             </a:r>
             <a:endParaRPr lang="en-US" sz="1400" dirty="0"/>
           </a:p>
@@ -1670,7 +1699,67 @@
                 <a:ea typeface="Yu Gothic UI" pitchFamily="34" charset="-122"/>
                 <a:cs typeface="Yu Gothic UI" pitchFamily="34" charset="-120"/>
               </a:rPr>
-              <a:t>・20件分類シート(シーン/判定/理由/エスカレ先)</a:t>
+              <a:t>・引受判定マスタシートに 20〜30 行が入っている</a:t>
+            </a:r>
+            <a:endParaRPr lang="en-US" sz="1400" dirty="0"/>
+          </a:p>
+          <a:p>
+            <a:pPr indent="0" marL="0">
+              <a:spcAft>
+                <a:spcPts val="400"/>
+              </a:spcAft>
+              <a:buNone/>
+            </a:pPr>
+            <a:r>
+              <a:rPr lang="en-US" sz="1400" dirty="0">
+                <a:solidFill>
+                  <a:srgbClr val="1A1A1A"/>
+                </a:solidFill>
+                <a:latin typeface="Yu Gothic UI" pitchFamily="34" charset="0"/>
+                <a:ea typeface="Yu Gothic UI" pitchFamily="34" charset="-122"/>
+                <a:cs typeface="Yu Gothic UI" pitchFamily="34" charset="-120"/>
+              </a:rPr>
+              <a:t>・「根拠」列が全行埋まっている(口伝でもOK、"口伝(要正式化)" と明記)</a:t>
+            </a:r>
+            <a:endParaRPr lang="en-US" sz="1400" dirty="0"/>
+          </a:p>
+          <a:p>
+            <a:pPr indent="0" marL="0">
+              <a:spcAft>
+                <a:spcPts val="400"/>
+              </a:spcAft>
+              <a:buNone/>
+            </a:pPr>
+            <a:r>
+              <a:rPr lang="en-US" sz="1400" dirty="0">
+                <a:solidFill>
+                  <a:srgbClr val="1A1A1A"/>
+                </a:solidFill>
+                <a:latin typeface="Yu Gothic UI" pitchFamily="34" charset="0"/>
+                <a:ea typeface="Yu Gothic UI" pitchFamily="34" charset="-122"/>
+                <a:cs typeface="Yu Gothic UI" pitchFamily="34" charset="-120"/>
+              </a:rPr>
+              <a:t>・重複条件が統合されている(同じ内容の2行が残っていない)</a:t>
+            </a:r>
+            <a:endParaRPr lang="en-US" sz="1400" dirty="0"/>
+          </a:p>
+          <a:p>
+            <a:pPr indent="0" marL="0">
+              <a:spcAft>
+                <a:spcPts val="400"/>
+              </a:spcAft>
+              <a:buNone/>
+            </a:pPr>
+            <a:r>
+              <a:rPr lang="en-US" sz="1400" dirty="0">
+                <a:solidFill>
+                  <a:srgbClr val="1A1A1A"/>
+                </a:solidFill>
+                <a:latin typeface="Yu Gothic UI" pitchFamily="34" charset="0"/>
+                <a:ea typeface="Yu Gothic UI" pitchFamily="34" charset="-122"/>
+                <a:cs typeface="Yu Gothic UI" pitchFamily="34" charset="-120"/>
+              </a:rPr>
+              <a:t>・「最終更新」列が全行埋まっている</a:t>
             </a:r>
             <a:endParaRPr lang="en-US" sz="1400" dirty="0"/>
           </a:p>
@@ -1798,47 +1887,67 @@
                 <a:ea typeface="Yu Gothic UI" pitchFamily="34" charset="-122"/>
                 <a:cs typeface="Yu Gothic UI" pitchFamily="34" charset="-120"/>
               </a:rPr>
-              <a:t>・社内ルールが曖昧な場合は「分かる範囲で」で進める。</a:t>
-            </a:r>
-            <a:endParaRPr lang="en-US" sz="1400" dirty="0"/>
-          </a:p>
-          <a:p>
-            <a:pPr indent="0" marL="0">
-              <a:spcAft>
-                <a:spcPts val="400"/>
-              </a:spcAft>
-              <a:buNone/>
-            </a:pPr>
-            <a:r>
-              <a:rPr lang="en-US" sz="1400" dirty="0">
-                <a:solidFill>
-                  <a:srgbClr val="1A1A1A"/>
-                </a:solidFill>
-                <a:latin typeface="Yu Gothic UI" pitchFamily="34" charset="0"/>
-                <a:ea typeface="Yu Gothic UI" pitchFamily="34" charset="-122"/>
-                <a:cs typeface="Yu Gothic UI" pitchFamily="34" charset="-120"/>
-              </a:rPr>
-              <a:t>・「全部 要確認」にして思考停止する生徒に注意。YES/NO を最低半数に。</a:t>
-            </a:r>
-            <a:endParaRPr lang="en-US" sz="1400" dirty="0"/>
-          </a:p>
-          <a:p>
-            <a:pPr indent="0" marL="0">
-              <a:spcAft>
-                <a:spcPts val="400"/>
-              </a:spcAft>
-              <a:buNone/>
-            </a:pPr>
-            <a:r>
-              <a:rPr lang="en-US" sz="1400" dirty="0">
-                <a:solidFill>
-                  <a:srgbClr val="1A1A1A"/>
-                </a:solidFill>
-                <a:latin typeface="Yu Gothic UI" pitchFamily="34" charset="0"/>
-                <a:ea typeface="Yu Gothic UI" pitchFamily="34" charset="-122"/>
-                <a:cs typeface="Yu Gothic UI" pitchFamily="34" charset="-120"/>
-              </a:rPr>
-              <a:t>・要確認のエスカレ先を明記しないと運用で詰まる。必須項目に。</a:t>
+              <a:t>・完璧を目指させない。20〜30行埋まればOK。残りは "後で追加" で。</a:t>
+            </a:r>
+            <a:endParaRPr lang="en-US" sz="1400" dirty="0"/>
+          </a:p>
+          <a:p>
+            <a:pPr indent="0" marL="0">
+              <a:spcAft>
+                <a:spcPts val="400"/>
+              </a:spcAft>
+              <a:buNone/>
+            </a:pPr>
+            <a:r>
+              <a:rPr lang="en-US" sz="1400" dirty="0">
+                <a:solidFill>
+                  <a:srgbClr val="1A1A1A"/>
+                </a:solidFill>
+                <a:latin typeface="Yu Gothic UI" pitchFamily="34" charset="0"/>
+                <a:ea typeface="Yu Gothic UI" pitchFamily="34" charset="-122"/>
+                <a:cs typeface="Yu Gothic UI" pitchFamily="34" charset="-120"/>
+              </a:rPr>
+              <a:t>・"口伝" を根拠に書くことを恥ずかしがる生徒がいる。「口伝も立派な情報、隠さず書く」と促す。</a:t>
+            </a:r>
+            <a:endParaRPr lang="en-US" sz="1400" dirty="0"/>
+          </a:p>
+          <a:p>
+            <a:pPr indent="0" marL="0">
+              <a:spcAft>
+                <a:spcPts val="400"/>
+              </a:spcAft>
+              <a:buNone/>
+            </a:pPr>
+            <a:r>
+              <a:rPr lang="en-US" sz="1400" dirty="0">
+                <a:solidFill>
+                  <a:srgbClr val="1A1A1A"/>
+                </a:solidFill>
+                <a:latin typeface="Yu Gothic UI" pitchFamily="34" charset="0"/>
+                <a:ea typeface="Yu Gothic UI" pitchFamily="34" charset="-122"/>
+                <a:cs typeface="Yu Gothic UI" pitchFamily="34" charset="-120"/>
+              </a:rPr>
+              <a:t>・カテゴリの粒度に迷ったら "健康" などざっくりで良い。細かすぎると更新が滞る。</a:t>
+            </a:r>
+            <a:endParaRPr lang="en-US" sz="1400" dirty="0"/>
+          </a:p>
+          <a:p>
+            <a:pPr indent="0" marL="0">
+              <a:spcAft>
+                <a:spcPts val="400"/>
+              </a:spcAft>
+              <a:buNone/>
+            </a:pPr>
+            <a:r>
+              <a:rPr lang="en-US" sz="1400" dirty="0">
+                <a:solidFill>
+                  <a:srgbClr val="1A1A1A"/>
+                </a:solidFill>
+                <a:latin typeface="Yu Gothic UI" pitchFamily="34" charset="0"/>
+                <a:ea typeface="Yu Gothic UI" pitchFamily="34" charset="-122"/>
+                <a:cs typeface="Yu Gothic UI" pitchFamily="34" charset="-120"/>
+              </a:rPr>
+              <a:t>・記入例シートを "そのままコピー" させない。自分の営業対象・自社商品に合わせて書き換えさせる。</a:t>
             </a:r>
             <a:endParaRPr lang="en-US" sz="1400" dirty="0"/>
           </a:p>
@@ -1929,7 +2038,7 @@
                 <a:ea typeface="Yu Gothic UI Semibold" pitchFamily="34" charset="-122"/>
                 <a:cs typeface="Yu Gothic UI Semibold" pitchFamily="34" charset="-120"/>
               </a:rPr>
-              <a:t>演習2 一次判定プロンプトの設計 — 解答・指導ポイント</a:t>
+              <a:t>演習2 マスタ表を使った一次判定 と 更新運用 — 解答・指導ポイント</a:t>
             </a:r>
             <a:endParaRPr lang="en-US" sz="2600" dirty="0"/>
           </a:p>
@@ -2096,107 +2205,294 @@
                 <a:ea typeface="Yu Gothic UI" pitchFamily="34" charset="-122"/>
                 <a:cs typeface="Yu Gothic UI" pitchFamily="34" charset="-120"/>
               </a:rPr>
-              <a:t>【貼り付け用】</a:t>
-            </a:r>
-            <a:endParaRPr lang="en-US" sz="1400" dirty="0"/>
-          </a:p>
-          <a:p>
-            <a:pPr indent="0" marL="0">
-              <a:spcAft>
-                <a:spcPts val="400"/>
-              </a:spcAft>
-              <a:buNone/>
-            </a:pPr>
-            <a:r>
-              <a:rPr lang="en-US" sz="1400" dirty="0">
-                <a:solidFill>
-                  <a:srgbClr val="1A1A1A"/>
-                </a:solidFill>
-                <a:latin typeface="Yu Gothic UI" pitchFamily="34" charset="0"/>
-                <a:ea typeface="Yu Gothic UI" pitchFamily="34" charset="-122"/>
-                <a:cs typeface="Yu Gothic UI" pitchFamily="34" charset="-120"/>
-              </a:rPr>
-              <a:t>上の20件基準を踏まえた一次判定プロンプトを作って。</a:t>
-            </a:r>
-            <a:endParaRPr lang="en-US" sz="1400" dirty="0"/>
-          </a:p>
-          <a:p>
-            <a:pPr indent="0" marL="0">
-              <a:spcAft>
-                <a:spcPts val="400"/>
-              </a:spcAft>
-              <a:buNone/>
-            </a:pPr>
-            <a:r>
-              <a:rPr lang="en-US" sz="1400" dirty="0">
-                <a:solidFill>
-                  <a:srgbClr val="1A1A1A"/>
-                </a:solidFill>
-                <a:latin typeface="Yu Gothic UI" pitchFamily="34" charset="0"/>
-                <a:ea typeface="Yu Gothic UI" pitchFamily="34" charset="-122"/>
-                <a:cs typeface="Yu Gothic UI" pitchFamily="34" charset="-120"/>
-              </a:rPr>
-              <a:t>・入力: 顧客情報(年齢/健康状態/希望商品)</a:t>
-            </a:r>
-            <a:endParaRPr lang="en-US" sz="1400" dirty="0"/>
-          </a:p>
-          <a:p>
-            <a:pPr indent="0" marL="0">
-              <a:spcAft>
-                <a:spcPts val="400"/>
-              </a:spcAft>
-              <a:buNone/>
-            </a:pPr>
-            <a:r>
-              <a:rPr lang="en-US" sz="1400" dirty="0">
-                <a:solidFill>
-                  <a:srgbClr val="1A1A1A"/>
-                </a:solidFill>
-                <a:latin typeface="Yu Gothic UI" pitchFamily="34" charset="0"/>
-                <a:ea typeface="Yu Gothic UI" pitchFamily="34" charset="-122"/>
-                <a:cs typeface="Yu Gothic UI" pitchFamily="34" charset="-120"/>
-              </a:rPr>
-              <a:t>・出力: 判定(YES/NO/要確認)+理由+次のアクション</a:t>
-            </a:r>
-            <a:endParaRPr lang="en-US" sz="1400" dirty="0"/>
-          </a:p>
-          <a:p>
-            <a:pPr indent="0" marL="0">
-              <a:spcAft>
-                <a:spcPts val="400"/>
-              </a:spcAft>
-              <a:buNone/>
-            </a:pPr>
-            <a:r>
-              <a:rPr lang="en-US" sz="1400" dirty="0">
-                <a:solidFill>
-                  <a:srgbClr val="1A1A1A"/>
-                </a:solidFill>
-                <a:latin typeface="Yu Gothic UI" pitchFamily="34" charset="0"/>
-                <a:ea typeface="Yu Gothic UI" pitchFamily="34" charset="-122"/>
-                <a:cs typeface="Yu Gothic UI" pitchFamily="34" charset="-120"/>
-              </a:rPr>
-              <a:t>・要確認の場合は確認項目をリスト化</a:t>
-            </a:r>
-            <a:endParaRPr lang="en-US" sz="1400" dirty="0"/>
-          </a:p>
-          <a:p>
-            <a:pPr indent="0" marL="0">
-              <a:spcAft>
-                <a:spcPts val="400"/>
-              </a:spcAft>
-              <a:buNone/>
-            </a:pPr>
-            <a:r>
-              <a:rPr lang="en-US" sz="1400" dirty="0">
-                <a:solidFill>
-                  <a:srgbClr val="1A1A1A"/>
-                </a:solidFill>
-                <a:latin typeface="Yu Gothic UI" pitchFamily="34" charset="0"/>
-                <a:ea typeface="Yu Gothic UI" pitchFamily="34" charset="-122"/>
-                <a:cs typeface="Yu Gothic UI" pitchFamily="34" charset="-120"/>
-              </a:rPr>
-              <a:t>・末尾に「最終判断は引受査定」と必ず付ける</a:t>
+              <a:t>【Gemini に渡すプロンプト例】</a:t>
+            </a:r>
+            <a:endParaRPr lang="en-US" sz="1400" dirty="0"/>
+          </a:p>
+          <a:p>
+            <a:pPr indent="0" marL="0">
+              <a:spcAft>
+                <a:spcPts val="400"/>
+              </a:spcAft>
+              <a:buNone/>
+            </a:pPr>
+            <a:r>
+              <a:rPr lang="en-US" sz="1400" dirty="0">
+                <a:solidFill>
+                  <a:srgbClr val="1A1A1A"/>
+                </a:solidFill>
+                <a:latin typeface="Yu Gothic UI" pitchFamily="34" charset="0"/>
+                <a:ea typeface="Yu Gothic UI" pitchFamily="34" charset="-122"/>
+                <a:cs typeface="Yu Gothic UI" pitchFamily="34" charset="-120"/>
+              </a:rPr>
+              <a:t>「以下はうちの保険引受判定マスタ表(CSV)です。</a:t>
+            </a:r>
+            <a:endParaRPr lang="en-US" sz="1400" dirty="0"/>
+          </a:p>
+          <a:p>
+            <a:pPr indent="0" marL="0">
+              <a:spcAft>
+                <a:spcPts val="400"/>
+              </a:spcAft>
+              <a:buNone/>
+            </a:pPr>
+            <a:r>
+              <a:rPr lang="en-US" sz="1400" dirty="0">
+                <a:solidFill>
+                  <a:srgbClr val="1A1A1A"/>
+                </a:solidFill>
+                <a:latin typeface="Yu Gothic UI" pitchFamily="34" charset="0"/>
+                <a:ea typeface="Yu Gothic UI" pitchFamily="34" charset="-122"/>
+                <a:cs typeface="Yu Gothic UI" pitchFamily="34" charset="-120"/>
+              </a:rPr>
+              <a:t>[マスタ表を CSV で貼付]</a:t>
+            </a:r>
+            <a:endParaRPr lang="en-US" sz="1400" dirty="0"/>
+          </a:p>
+          <a:p>
+            <a:pPr indent="0" marL="0">
+              <a:spcAft>
+                <a:spcPts val="400"/>
+              </a:spcAft>
+              <a:buNone/>
+            </a:pPr>
+            <a:endParaRPr lang="en-US" sz="1400" dirty="0"/>
+          </a:p>
+          <a:p>
+            <a:pPr indent="0" marL="0">
+              <a:spcAft>
+                <a:spcPts val="400"/>
+              </a:spcAft>
+              <a:buNone/>
+            </a:pPr>
+            <a:r>
+              <a:rPr lang="en-US" sz="1400" dirty="0">
+                <a:solidFill>
+                  <a:srgbClr val="1A1A1A"/>
+                </a:solidFill>
+                <a:latin typeface="Yu Gothic UI" pitchFamily="34" charset="0"/>
+                <a:ea typeface="Yu Gothic UI" pitchFamily="34" charset="-122"/>
+                <a:cs typeface="Yu Gothic UI" pitchFamily="34" charset="-120"/>
+              </a:rPr>
+              <a:t>これをルールとして、次の顧客について 一次判定 してください。</a:t>
+            </a:r>
+            <a:endParaRPr lang="en-US" sz="1400" dirty="0"/>
+          </a:p>
+          <a:p>
+            <a:pPr indent="0" marL="0">
+              <a:spcAft>
+                <a:spcPts val="400"/>
+              </a:spcAft>
+              <a:buNone/>
+            </a:pPr>
+            <a:r>
+              <a:rPr lang="en-US" sz="1400" dirty="0">
+                <a:solidFill>
+                  <a:srgbClr val="1A1A1A"/>
+                </a:solidFill>
+                <a:latin typeface="Yu Gothic UI" pitchFamily="34" charset="0"/>
+                <a:ea typeface="Yu Gothic UI" pitchFamily="34" charset="-122"/>
+                <a:cs typeface="Yu Gothic UI" pitchFamily="34" charset="-120"/>
+              </a:rPr>
+              <a:t>- 顧客: 45歳男性 / 高血圧治療中(1年経過、コントロール良好) / 医療保険希望</a:t>
+            </a:r>
+            <a:endParaRPr lang="en-US" sz="1400" dirty="0"/>
+          </a:p>
+          <a:p>
+            <a:pPr indent="0" marL="0">
+              <a:spcAft>
+                <a:spcPts val="400"/>
+              </a:spcAft>
+              <a:buNone/>
+            </a:pPr>
+            <a:endParaRPr lang="en-US" sz="1400" dirty="0"/>
+          </a:p>
+          <a:p>
+            <a:pPr indent="0" marL="0">
+              <a:spcAft>
+                <a:spcPts val="400"/>
+              </a:spcAft>
+              <a:buNone/>
+            </a:pPr>
+            <a:r>
+              <a:rPr lang="en-US" sz="1400" dirty="0">
+                <a:solidFill>
+                  <a:srgbClr val="1A1A1A"/>
+                </a:solidFill>
+                <a:latin typeface="Yu Gothic UI" pitchFamily="34" charset="0"/>
+                <a:ea typeface="Yu Gothic UI" pitchFamily="34" charset="-122"/>
+                <a:cs typeface="Yu Gothic UI" pitchFamily="34" charset="-120"/>
+              </a:rPr>
+              <a:t>出力形式:</a:t>
+            </a:r>
+            <a:endParaRPr lang="en-US" sz="1400" dirty="0"/>
+          </a:p>
+          <a:p>
+            <a:pPr indent="0" marL="0">
+              <a:spcAft>
+                <a:spcPts val="400"/>
+              </a:spcAft>
+              <a:buNone/>
+            </a:pPr>
+            <a:r>
+              <a:rPr lang="en-US" sz="1400" dirty="0">
+                <a:solidFill>
+                  <a:srgbClr val="1A1A1A"/>
+                </a:solidFill>
+                <a:latin typeface="Yu Gothic UI" pitchFamily="34" charset="0"/>
+                <a:ea typeface="Yu Gothic UI" pitchFamily="34" charset="-122"/>
+                <a:cs typeface="Yu Gothic UI" pitchFamily="34" charset="-120"/>
+              </a:rPr>
+              <a:t>- 参照した条件ID: RULE-XXX</a:t>
+            </a:r>
+            <a:endParaRPr lang="en-US" sz="1400" dirty="0"/>
+          </a:p>
+          <a:p>
+            <a:pPr indent="0" marL="0">
+              <a:spcAft>
+                <a:spcPts val="400"/>
+              </a:spcAft>
+              <a:buNone/>
+            </a:pPr>
+            <a:r>
+              <a:rPr lang="en-US" sz="1400" dirty="0">
+                <a:solidFill>
+                  <a:srgbClr val="1A1A1A"/>
+                </a:solidFill>
+                <a:latin typeface="Yu Gothic UI" pitchFamily="34" charset="0"/>
+                <a:ea typeface="Yu Gothic UI" pitchFamily="34" charset="-122"/>
+                <a:cs typeface="Yu Gothic UI" pitchFamily="34" charset="-120"/>
+              </a:rPr>
+              <a:t>- 判定: YES / YES(条件付) / 要確認 / NO</a:t>
+            </a:r>
+            <a:endParaRPr lang="en-US" sz="1400" dirty="0"/>
+          </a:p>
+          <a:p>
+            <a:pPr indent="0" marL="0">
+              <a:spcAft>
+                <a:spcPts val="400"/>
+              </a:spcAft>
+              <a:buNone/>
+            </a:pPr>
+            <a:r>
+              <a:rPr lang="en-US" sz="1400" dirty="0">
+                <a:solidFill>
+                  <a:srgbClr val="1A1A1A"/>
+                </a:solidFill>
+                <a:latin typeface="Yu Gothic UI" pitchFamily="34" charset="0"/>
+                <a:ea typeface="Yu Gothic UI" pitchFamily="34" charset="-122"/>
+                <a:cs typeface="Yu Gothic UI" pitchFamily="34" charset="-120"/>
+              </a:rPr>
+              <a:t>- 理由: 1〜2文</a:t>
+            </a:r>
+            <a:endParaRPr lang="en-US" sz="1400" dirty="0"/>
+          </a:p>
+          <a:p>
+            <a:pPr indent="0" marL="0">
+              <a:spcAft>
+                <a:spcPts val="400"/>
+              </a:spcAft>
+              <a:buNone/>
+            </a:pPr>
+            <a:r>
+              <a:rPr lang="en-US" sz="1400" dirty="0">
+                <a:solidFill>
+                  <a:srgbClr val="1A1A1A"/>
+                </a:solidFill>
+                <a:latin typeface="Yu Gothic UI" pitchFamily="34" charset="0"/>
+                <a:ea typeface="Yu Gothic UI" pitchFamily="34" charset="-122"/>
+                <a:cs typeface="Yu Gothic UI" pitchFamily="34" charset="-120"/>
+              </a:rPr>
+              <a:t>- 次のアクション: 顧客への説明/確認項目/エスカレ先</a:t>
+            </a:r>
+            <a:endParaRPr lang="en-US" sz="1400" dirty="0"/>
+          </a:p>
+          <a:p>
+            <a:pPr indent="0" marL="0">
+              <a:spcAft>
+                <a:spcPts val="400"/>
+              </a:spcAft>
+              <a:buNone/>
+            </a:pPr>
+            <a:r>
+              <a:rPr lang="en-US" sz="1400" dirty="0">
+                <a:solidFill>
+                  <a:srgbClr val="1A1A1A"/>
+                </a:solidFill>
+                <a:latin typeface="Yu Gothic UI" pitchFamily="34" charset="0"/>
+                <a:ea typeface="Yu Gothic UI" pitchFamily="34" charset="-122"/>
+                <a:cs typeface="Yu Gothic UI" pitchFamily="34" charset="-120"/>
+              </a:rPr>
+              <a:t>該当ルールがない場合は "該当なし → 要確認 (人が判定)" と返してください。</a:t>
+            </a:r>
+            <a:endParaRPr lang="en-US" sz="1400" dirty="0"/>
+          </a:p>
+          <a:p>
+            <a:pPr indent="0" marL="0">
+              <a:spcAft>
+                <a:spcPts val="400"/>
+              </a:spcAft>
+              <a:buNone/>
+            </a:pPr>
+            <a:r>
+              <a:rPr lang="en-US" sz="1400" dirty="0">
+                <a:solidFill>
+                  <a:srgbClr val="1A1A1A"/>
+                </a:solidFill>
+                <a:latin typeface="Yu Gothic UI" pitchFamily="34" charset="0"/>
+                <a:ea typeface="Yu Gothic UI" pitchFamily="34" charset="-122"/>
+                <a:cs typeface="Yu Gothic UI" pitchFamily="34" charset="-120"/>
+              </a:rPr>
+              <a:t>最終判断は引受査定課が行います。」</a:t>
+            </a:r>
+            <a:endParaRPr lang="en-US" sz="1400" dirty="0"/>
+          </a:p>
+          <a:p>
+            <a:pPr indent="0" marL="0">
+              <a:spcAft>
+                <a:spcPts val="400"/>
+              </a:spcAft>
+              <a:buNone/>
+            </a:pPr>
+            <a:endParaRPr lang="en-US" sz="1400" dirty="0"/>
+          </a:p>
+          <a:p>
+            <a:pPr indent="0" marL="0">
+              <a:spcAft>
+                <a:spcPts val="400"/>
+              </a:spcAft>
+              <a:buNone/>
+            </a:pPr>
+            <a:r>
+              <a:rPr lang="en-US" sz="1400" dirty="0">
+                <a:solidFill>
+                  <a:srgbClr val="1A1A1A"/>
+                </a:solidFill>
+                <a:latin typeface="Yu Gothic UI" pitchFamily="34" charset="0"/>
+                <a:ea typeface="Yu Gothic UI" pitchFamily="34" charset="-122"/>
+                <a:cs typeface="Yu Gothic UI" pitchFamily="34" charset="-120"/>
+              </a:rPr>
+              <a:t>【該当なしテスト】</a:t>
+            </a:r>
+            <a:endParaRPr lang="en-US" sz="1400" dirty="0"/>
+          </a:p>
+          <a:p>
+            <a:pPr indent="0" marL="0">
+              <a:spcAft>
+                <a:spcPts val="400"/>
+              </a:spcAft>
+              <a:buNone/>
+            </a:pPr>
+            <a:r>
+              <a:rPr lang="en-US" sz="1400" dirty="0">
+                <a:solidFill>
+                  <a:srgbClr val="1A1A1A"/>
+                </a:solidFill>
+                <a:latin typeface="Yu Gothic UI" pitchFamily="34" charset="0"/>
+                <a:ea typeface="Yu Gothic UI" pitchFamily="34" charset="-122"/>
+                <a:cs typeface="Yu Gothic UI" pitchFamily="34" charset="-120"/>
+              </a:rPr>
+              <a:t>「顧客: 30歳男性 / パラグライダー競技選手 / 死亡保険」を投げて "該当なし → 要確認" が返るか確認。</a:t>
             </a:r>
             <a:endParaRPr lang="en-US" sz="1400" dirty="0"/>
           </a:p>
@@ -2324,27 +2620,87 @@
                 <a:ea typeface="Yu Gothic UI" pitchFamily="34" charset="-122"/>
                 <a:cs typeface="Yu Gothic UI" pitchFamily="34" charset="-120"/>
               </a:rPr>
-              <a:t>・一次判定プロンプト</a:t>
-            </a:r>
-            <a:endParaRPr lang="en-US" sz="1400" dirty="0"/>
-          </a:p>
-          <a:p>
-            <a:pPr indent="0" marL="0">
-              <a:spcAft>
-                <a:spcPts val="400"/>
-              </a:spcAft>
-              <a:buNone/>
-            </a:pPr>
-            <a:r>
-              <a:rPr lang="en-US" sz="1400" dirty="0">
-                <a:solidFill>
-                  <a:srgbClr val="1A1A1A"/>
-                </a:solidFill>
-                <a:latin typeface="Yu Gothic UI" pitchFamily="34" charset="0"/>
-                <a:ea typeface="Yu Gothic UI" pitchFamily="34" charset="-122"/>
-                <a:cs typeface="Yu Gothic UI" pitchFamily="34" charset="-120"/>
-              </a:rPr>
-              <a:t>・テストシナリオ5件で精度確認</a:t>
+              <a:t>・3件の顧客について 一次判定 が動く</a:t>
+            </a:r>
+            <a:endParaRPr lang="en-US" sz="1400" dirty="0"/>
+          </a:p>
+          <a:p>
+            <a:pPr indent="0" marL="0">
+              <a:spcAft>
+                <a:spcPts val="400"/>
+              </a:spcAft>
+              <a:buNone/>
+            </a:pPr>
+            <a:r>
+              <a:rPr lang="en-US" sz="1400" dirty="0">
+                <a:solidFill>
+                  <a:srgbClr val="1A1A1A"/>
+                </a:solidFill>
+                <a:latin typeface="Yu Gothic UI" pitchFamily="34" charset="0"/>
+                <a:ea typeface="Yu Gothic UI" pitchFamily="34" charset="-122"/>
+                <a:cs typeface="Yu Gothic UI" pitchFamily="34" charset="-120"/>
+              </a:rPr>
+              <a:t>・全ての判定に "参照条件ID" が付いている</a:t>
+            </a:r>
+            <a:endParaRPr lang="en-US" sz="1400" dirty="0"/>
+          </a:p>
+          <a:p>
+            <a:pPr indent="0" marL="0">
+              <a:spcAft>
+                <a:spcPts val="400"/>
+              </a:spcAft>
+              <a:buNone/>
+            </a:pPr>
+            <a:r>
+              <a:rPr lang="en-US" sz="1400" dirty="0">
+                <a:solidFill>
+                  <a:srgbClr val="1A1A1A"/>
+                </a:solidFill>
+                <a:latin typeface="Yu Gothic UI" pitchFamily="34" charset="0"/>
+                <a:ea typeface="Yu Gothic UI" pitchFamily="34" charset="-122"/>
+                <a:cs typeface="Yu Gothic UI" pitchFamily="34" charset="-120"/>
+              </a:rPr>
+              <a:t>・該当なしテストで "自動 YES" にならず要確認になる</a:t>
+            </a:r>
+            <a:endParaRPr lang="en-US" sz="1400" dirty="0"/>
+          </a:p>
+          <a:p>
+            <a:pPr indent="0" marL="0">
+              <a:spcAft>
+                <a:spcPts val="400"/>
+              </a:spcAft>
+              <a:buNone/>
+            </a:pPr>
+            <a:r>
+              <a:rPr lang="en-US" sz="1400" dirty="0">
+                <a:solidFill>
+                  <a:srgbClr val="1A1A1A"/>
+                </a:solidFill>
+                <a:latin typeface="Yu Gothic UI" pitchFamily="34" charset="0"/>
+                <a:ea typeface="Yu Gothic UI" pitchFamily="34" charset="-122"/>
+                <a:cs typeface="Yu Gothic UI" pitchFamily="34" charset="-120"/>
+              </a:rPr>
+              <a:t>・更新ログシートに 2件のダミー更新が入っている</a:t>
+            </a:r>
+            <a:endParaRPr lang="en-US" sz="1400" dirty="0"/>
+          </a:p>
+          <a:p>
+            <a:pPr indent="0" marL="0">
+              <a:spcAft>
+                <a:spcPts val="400"/>
+              </a:spcAft>
+              <a:buNone/>
+            </a:pPr>
+            <a:r>
+              <a:rPr lang="en-US" sz="1400" dirty="0">
+                <a:solidFill>
+                  <a:srgbClr val="1A1A1A"/>
+                </a:solidFill>
+                <a:latin typeface="Yu Gothic UI" pitchFamily="34" charset="0"/>
+                <a:ea typeface="Yu Gothic UI" pitchFamily="34" charset="-122"/>
+                <a:cs typeface="Yu Gothic UI" pitchFamily="34" charset="-120"/>
+              </a:rPr>
+              <a:t>・月次見直しの担当者と曜日が決まっている</a:t>
             </a:r>
             <a:endParaRPr lang="en-US" sz="1400" dirty="0"/>
           </a:p>
@@ -2472,47 +2828,67 @@
                 <a:ea typeface="Yu Gothic UI" pitchFamily="34" charset="-122"/>
                 <a:cs typeface="Yu Gothic UI" pitchFamily="34" charset="-120"/>
               </a:rPr>
-              <a:t>・「最終判断は引受査定」の免責を絶対忘れさせない。</a:t>
-            </a:r>
-            <a:endParaRPr lang="en-US" sz="1400" dirty="0"/>
-          </a:p>
-          <a:p>
-            <a:pPr indent="0" marL="0">
-              <a:spcAft>
-                <a:spcPts val="400"/>
-              </a:spcAft>
-              <a:buNone/>
-            </a:pPr>
-            <a:r>
-              <a:rPr lang="en-US" sz="1400" dirty="0">
-                <a:solidFill>
-                  <a:srgbClr val="1A1A1A"/>
-                </a:solidFill>
-                <a:latin typeface="Yu Gothic UI" pitchFamily="34" charset="0"/>
-                <a:ea typeface="Yu Gothic UI" pitchFamily="34" charset="-122"/>
-                <a:cs typeface="Yu Gothic UI" pitchFamily="34" charset="-120"/>
-              </a:rPr>
-              <a:t>・AI が断定的に答えるとトラブルの元。「~の可能性が高い」等の表現を促す。</a:t>
-            </a:r>
-            <a:endParaRPr lang="en-US" sz="1400" dirty="0"/>
-          </a:p>
-          <a:p>
-            <a:pPr indent="0" marL="0">
-              <a:spcAft>
-                <a:spcPts val="400"/>
-              </a:spcAft>
-              <a:buNone/>
-            </a:pPr>
-            <a:r>
-              <a:rPr lang="en-US" sz="1400" dirty="0">
-                <a:solidFill>
-                  <a:srgbClr val="1A1A1A"/>
-                </a:solidFill>
-                <a:latin typeface="Yu Gothic UI" pitchFamily="34" charset="0"/>
-                <a:ea typeface="Yu Gothic UI" pitchFamily="34" charset="-122"/>
-                <a:cs typeface="Yu Gothic UI" pitchFamily="34" charset="-120"/>
-              </a:rPr>
-              <a:t>・テストシナリオは現場の実例を使う。架空だと精度が分からない。</a:t>
+              <a:t>・「該当なし = YES」に AI がしないよう、"該当なし = 要確認" を必ずプロンプトに書かせる。</a:t>
+            </a:r>
+            <a:endParaRPr lang="en-US" sz="1400" dirty="0"/>
+          </a:p>
+          <a:p>
+            <a:pPr indent="0" marL="0">
+              <a:spcAft>
+                <a:spcPts val="400"/>
+              </a:spcAft>
+              <a:buNone/>
+            </a:pPr>
+            <a:r>
+              <a:rPr lang="en-US" sz="1400" dirty="0">
+                <a:solidFill>
+                  <a:srgbClr val="1A1A1A"/>
+                </a:solidFill>
+                <a:latin typeface="Yu Gothic UI" pitchFamily="34" charset="0"/>
+                <a:ea typeface="Yu Gothic UI" pitchFamily="34" charset="-122"/>
+                <a:cs typeface="Yu Gothic UI" pitchFamily="34" charset="-120"/>
+              </a:rPr>
+              <a:t>・条件IDを出力に含める運用が重要。後で "なぜこの判定?" の監査ができる。</a:t>
+            </a:r>
+            <a:endParaRPr lang="en-US" sz="1400" dirty="0"/>
+          </a:p>
+          <a:p>
+            <a:pPr indent="0" marL="0">
+              <a:spcAft>
+                <a:spcPts val="400"/>
+              </a:spcAft>
+              <a:buNone/>
+            </a:pPr>
+            <a:r>
+              <a:rPr lang="en-US" sz="1400" dirty="0">
+                <a:solidFill>
+                  <a:srgbClr val="1A1A1A"/>
+                </a:solidFill>
+                <a:latin typeface="Yu Gothic UI" pitchFamily="34" charset="0"/>
+                <a:ea typeface="Yu Gothic UI" pitchFamily="34" charset="-122"/>
+                <a:cs typeface="Yu Gothic UI" pitchFamily="34" charset="-120"/>
+              </a:rPr>
+              <a:t>・"削除" 運用は禁止(履歴が失われる)。無効化列を追加する運用に統一。</a:t>
+            </a:r>
+            <a:endParaRPr lang="en-US" sz="1400" dirty="0"/>
+          </a:p>
+          <a:p>
+            <a:pPr indent="0" marL="0">
+              <a:spcAft>
+                <a:spcPts val="400"/>
+              </a:spcAft>
+              <a:buNone/>
+            </a:pPr>
+            <a:r>
+              <a:rPr lang="en-US" sz="1400" dirty="0">
+                <a:solidFill>
+                  <a:srgbClr val="1A1A1A"/>
+                </a:solidFill>
+                <a:latin typeface="Yu Gothic UI" pitchFamily="34" charset="0"/>
+                <a:ea typeface="Yu Gothic UI" pitchFamily="34" charset="-122"/>
+                <a:cs typeface="Yu Gothic UI" pitchFamily="34" charset="-120"/>
+              </a:rPr>
+              <a:t>・月1回15分の見直しでも十分。時間より "続くこと" が重要と伝える。</a:t>
             </a:r>
             <a:endParaRPr lang="en-US" sz="1400" dirty="0"/>
           </a:p>

--- a/lecture_pptx/out/s15/ワーク01_講師用.pptx
+++ b/lecture_pptx/out/s15/ワーク01_講師用.pptx
@@ -1106,7 +1106,7 @@
                 <a:ea typeface="Yu Gothic UI Semibold" pitchFamily="34" charset="-122"/>
                 <a:cs typeface="Yu Gothic UI Semibold" pitchFamily="34" charset="-120"/>
               </a:rPr>
-              <a:t>散在ナレッジを "引受判定マスタ表" に統合する</a:t>
+              <a:t>代理店の "事前引受スクリーニング" を マスタ表化する</a:t>
             </a:r>
             <a:endParaRPr lang="en-US" sz="3800" dirty="0"/>
           </a:p>
@@ -1145,7 +1145,7 @@
                 <a:ea typeface="Yu Gothic UI" pitchFamily="34" charset="-122"/>
                 <a:cs typeface="Yu Gothic UI" pitchFamily="34" charset="-120"/>
               </a:rPr>
-              <a:t>口伝・チャット・旧文書に散らばる判定ルールを、AIが読める1つの表に統合し、更新できる形にする</a:t>
+              <a:t>扱う各社の引受基準を1つの表に整理し、AIで "どの会社なら通りそうか" を申込前に見立てる</a:t>
             </a:r>
             <a:endParaRPr lang="en-US" sz="1900" dirty="0"/>
           </a:p>
@@ -1275,7 +1275,7 @@
                 <a:ea typeface="Yu Gothic UI Semibold" pitchFamily="34" charset="-122"/>
                 <a:cs typeface="Yu Gothic UI Semibold" pitchFamily="34" charset="-120"/>
               </a:rPr>
-              <a:t>演習1 散在ナレッジを「マスタ表」10列に整理する — 解答・指導ポイント</a:t>
+              <a:t>演習1 散在ナレッジを 代理店マスタ表 10列に統合 — 解答・指導ポイント</a:t>
             </a:r>
             <a:endParaRPr lang="en-US" sz="2600" dirty="0"/>
           </a:p>
@@ -1462,47 +1462,67 @@
                 <a:ea typeface="Yu Gothic UI" pitchFamily="34" charset="-122"/>
                 <a:cs typeface="Yu Gothic UI" pitchFamily="34" charset="-120"/>
               </a:rPr>
-              <a:t>・「デモナレッジ01の口伝メモを読んで、まず1件だけマスタ表に入れてみて」</a:t>
-            </a:r>
-            <a:endParaRPr lang="en-US" sz="1400" dirty="0"/>
-          </a:p>
-          <a:p>
-            <a:pPr indent="0" marL="0">
-              <a:spcAft>
-                <a:spcPts val="400"/>
-              </a:spcAft>
-              <a:buNone/>
-            </a:pPr>
-            <a:r>
-              <a:rPr lang="en-US" sz="1400" dirty="0">
-                <a:solidFill>
-                  <a:srgbClr val="1A1A1A"/>
-                </a:solidFill>
-                <a:latin typeface="Yu Gothic UI" pitchFamily="34" charset="0"/>
-                <a:ea typeface="Yu Gothic UI" pitchFamily="34" charset="-122"/>
-                <a:cs typeface="Yu Gothic UI" pitchFamily="34" charset="-120"/>
-              </a:rPr>
-              <a:t>・「デモナレッジ02(Slack)と03(旧マニュアル)で "同じ条件" 見つかった?一つに統合して」</a:t>
-            </a:r>
-            <a:endParaRPr lang="en-US" sz="1400" dirty="0"/>
-          </a:p>
-          <a:p>
-            <a:pPr indent="0" marL="0">
-              <a:spcAft>
-                <a:spcPts val="400"/>
-              </a:spcAft>
-              <a:buNone/>
-            </a:pPr>
-            <a:r>
-              <a:rPr lang="en-US" sz="1400" dirty="0">
-                <a:solidFill>
-                  <a:srgbClr val="1A1A1A"/>
-                </a:solidFill>
-                <a:latin typeface="Yu Gothic UI" pitchFamily="34" charset="0"/>
-                <a:ea typeface="Yu Gothic UI" pitchFamily="34" charset="-122"/>
-                <a:cs typeface="Yu Gothic UI" pitchFamily="34" charset="-120"/>
-              </a:rPr>
-              <a:t>・「根拠列に "田中課長談(2024年Slack)" と書いておけば、後で確認できる」</a:t>
+              <a:t>・「デモナレッジ01(先輩口伝)の "妊娠中は B社が告知項目なしで通る" を まず1行入れてみて」</a:t>
+            </a:r>
+            <a:endParaRPr lang="en-US" sz="1400" dirty="0"/>
+          </a:p>
+          <a:p>
+            <a:pPr indent="0" marL="0">
+              <a:spcAft>
+                <a:spcPts val="400"/>
+              </a:spcAft>
+              <a:buNone/>
+            </a:pPr>
+            <a:r>
+              <a:rPr lang="en-US" sz="1400" dirty="0">
+                <a:solidFill>
+                  <a:srgbClr val="1A1A1A"/>
+                </a:solidFill>
+                <a:latin typeface="Yu Gothic UI" pitchFamily="34" charset="0"/>
+                <a:ea typeface="Yu Gothic UI" pitchFamily="34" charset="-122"/>
+                <a:cs typeface="Yu Gothic UI" pitchFamily="34" charset="-120"/>
+              </a:rPr>
+              <a:t>・「デモナレッジ02(B社チャット 2024/07/18) にも同じ内容ある?→ 1行に統合、情報源列に両方書く」</a:t>
+            </a:r>
+            <a:endParaRPr lang="en-US" sz="1400" dirty="0"/>
+          </a:p>
+          <a:p>
+            <a:pPr indent="0" marL="0">
+              <a:spcAft>
+                <a:spcPts val="400"/>
+              </a:spcAft>
+              <a:buNone/>
+            </a:pPr>
+            <a:r>
+              <a:rPr lang="en-US" sz="1400" dirty="0">
+                <a:solidFill>
+                  <a:srgbClr val="1A1A1A"/>
+                </a:solidFill>
+                <a:latin typeface="Yu Gothic UI" pitchFamily="34" charset="0"/>
+                <a:ea typeface="Yu Gothic UI" pitchFamily="34" charset="-122"/>
+                <a:cs typeface="Yu Gothic UI" pitchFamily="34" charset="-120"/>
+              </a:rPr>
+              <a:t>・「デモナレッジ03(A社研修)の "妊娠12週未満NG" は A社行として 別の行 に書く」</a:t>
+            </a:r>
+            <a:endParaRPr lang="en-US" sz="1400" dirty="0"/>
+          </a:p>
+          <a:p>
+            <a:pPr indent="0" marL="0">
+              <a:spcAft>
+                <a:spcPts val="400"/>
+              </a:spcAft>
+              <a:buNone/>
+            </a:pPr>
+            <a:r>
+              <a:rPr lang="en-US" sz="1400" dirty="0">
+                <a:solidFill>
+                  <a:srgbClr val="1A1A1A"/>
+                </a:solidFill>
+                <a:latin typeface="Yu Gothic UI" pitchFamily="34" charset="0"/>
+                <a:ea typeface="Yu Gothic UI" pitchFamily="34" charset="-122"/>
+                <a:cs typeface="Yu Gothic UI" pitchFamily="34" charset="-120"/>
+              </a:rPr>
+              <a:t>・「A社NG行の H列に "代替: B社なら告知項目なしで通る" と書いておくと、次の営業で即使える」</a:t>
             </a:r>
             <a:endParaRPr lang="en-US" sz="1400" dirty="0"/>
           </a:p>
@@ -1551,27 +1571,27 @@
                 <a:ea typeface="Yu Gothic UI" pitchFamily="34" charset="-122"/>
                 <a:cs typeface="Yu Gothic UI" pitchFamily="34" charset="-120"/>
               </a:rPr>
-              <a:t>「以下のメモから引受判定条件を抽出して、10列のマスタ表(条件ID/カテゴリ/対象商品/条件詳細/判定/理由/追加確認/エスカレ先/根拠/更新日)にJSONで整理して。</a:t>
-            </a:r>
-            <a:endParaRPr lang="en-US" sz="1400" dirty="0"/>
-          </a:p>
-          <a:p>
-            <a:pPr indent="0" marL="0">
-              <a:spcAft>
-                <a:spcPts val="400"/>
-              </a:spcAft>
-              <a:buNone/>
-            </a:pPr>
-            <a:r>
-              <a:rPr lang="en-US" sz="1400" dirty="0">
-                <a:solidFill>
-                  <a:srgbClr val="1A1A1A"/>
-                </a:solidFill>
-                <a:latin typeface="Yu Gothic UI" pitchFamily="34" charset="0"/>
-                <a:ea typeface="Yu Gothic UI" pitchFamily="34" charset="-122"/>
-                <a:cs typeface="Yu Gothic UI" pitchFamily="34" charset="-120"/>
-              </a:rPr>
-              <a:t>[デモナレッジ01の本文を貼付]」</a:t>
+              <a:t>「以下は保険代理店の情報源です。ここから引受判定条件を抽出して、10列の代理店マスタ表(条件ID/カテゴリ/保険会社/商品ジャンル/条件詳細/判定/理由/対応or代替候補社/情報源/更新日)にJSONで整理して。同じ条件でも会社で判定が違う場合は 別々の行にしてください。</a:t>
+            </a:r>
+            <a:endParaRPr lang="en-US" sz="1400" dirty="0"/>
+          </a:p>
+          <a:p>
+            <a:pPr indent="0" marL="0">
+              <a:spcAft>
+                <a:spcPts val="400"/>
+              </a:spcAft>
+              <a:buNone/>
+            </a:pPr>
+            <a:r>
+              <a:rPr lang="en-US" sz="1400" dirty="0">
+                <a:solidFill>
+                  <a:srgbClr val="1A1A1A"/>
+                </a:solidFill>
+                <a:latin typeface="Yu Gothic UI" pitchFamily="34" charset="0"/>
+                <a:ea typeface="Yu Gothic UI" pitchFamily="34" charset="-122"/>
+                <a:cs typeface="Yu Gothic UI" pitchFamily="34" charset="-120"/>
+              </a:rPr>
+              <a:t>[デモナレッジ01〜06のいずれかを貼付]」</a:t>
             </a:r>
             <a:endParaRPr lang="en-US" sz="1400" dirty="0"/>
           </a:p>
@@ -1699,67 +1719,67 @@
                 <a:ea typeface="Yu Gothic UI" pitchFamily="34" charset="-122"/>
                 <a:cs typeface="Yu Gothic UI" pitchFamily="34" charset="-120"/>
               </a:rPr>
-              <a:t>・引受判定マスタシートに 20〜30 行が入っている</a:t>
-            </a:r>
-            <a:endParaRPr lang="en-US" sz="1400" dirty="0"/>
-          </a:p>
-          <a:p>
-            <a:pPr indent="0" marL="0">
-              <a:spcAft>
-                <a:spcPts val="400"/>
-              </a:spcAft>
-              <a:buNone/>
-            </a:pPr>
-            <a:r>
-              <a:rPr lang="en-US" sz="1400" dirty="0">
-                <a:solidFill>
-                  <a:srgbClr val="1A1A1A"/>
-                </a:solidFill>
-                <a:latin typeface="Yu Gothic UI" pitchFamily="34" charset="0"/>
-                <a:ea typeface="Yu Gothic UI" pitchFamily="34" charset="-122"/>
-                <a:cs typeface="Yu Gothic UI" pitchFamily="34" charset="-120"/>
-              </a:rPr>
-              <a:t>・「根拠」列が全行埋まっている(口伝でもOK、"口伝(要正式化)" と明記)</a:t>
-            </a:r>
-            <a:endParaRPr lang="en-US" sz="1400" dirty="0"/>
-          </a:p>
-          <a:p>
-            <a:pPr indent="0" marL="0">
-              <a:spcAft>
-                <a:spcPts val="400"/>
-              </a:spcAft>
-              <a:buNone/>
-            </a:pPr>
-            <a:r>
-              <a:rPr lang="en-US" sz="1400" dirty="0">
-                <a:solidFill>
-                  <a:srgbClr val="1A1A1A"/>
-                </a:solidFill>
-                <a:latin typeface="Yu Gothic UI" pitchFamily="34" charset="0"/>
-                <a:ea typeface="Yu Gothic UI" pitchFamily="34" charset="-122"/>
-                <a:cs typeface="Yu Gothic UI" pitchFamily="34" charset="-120"/>
-              </a:rPr>
-              <a:t>・重複条件が統合されている(同じ内容の2行が残っていない)</a:t>
-            </a:r>
-            <a:endParaRPr lang="en-US" sz="1400" dirty="0"/>
-          </a:p>
-          <a:p>
-            <a:pPr indent="0" marL="0">
-              <a:spcAft>
-                <a:spcPts val="400"/>
-              </a:spcAft>
-              <a:buNone/>
-            </a:pPr>
-            <a:r>
-              <a:rPr lang="en-US" sz="1400" dirty="0">
-                <a:solidFill>
-                  <a:srgbClr val="1A1A1A"/>
-                </a:solidFill>
-                <a:latin typeface="Yu Gothic UI" pitchFamily="34" charset="0"/>
-                <a:ea typeface="Yu Gothic UI" pitchFamily="34" charset="-122"/>
-                <a:cs typeface="Yu Gothic UI" pitchFamily="34" charset="-120"/>
-              </a:rPr>
-              <a:t>・「最終更新」列が全行埋まっている</a:t>
+              <a:t>・引受判定マスタシートに 20〜30 行(2〜4社ぶん)が入っている</a:t>
+            </a:r>
+            <a:endParaRPr lang="en-US" sz="1400" dirty="0"/>
+          </a:p>
+          <a:p>
+            <a:pPr indent="0" marL="0">
+              <a:spcAft>
+                <a:spcPts val="400"/>
+              </a:spcAft>
+              <a:buNone/>
+            </a:pPr>
+            <a:r>
+              <a:rPr lang="en-US" sz="1400" dirty="0">
+                <a:solidFill>
+                  <a:srgbClr val="1A1A1A"/>
+                </a:solidFill>
+                <a:latin typeface="Yu Gothic UI" pitchFamily="34" charset="0"/>
+                <a:ea typeface="Yu Gothic UI" pitchFamily="34" charset="-122"/>
+                <a:cs typeface="Yu Gothic UI" pitchFamily="34" charset="-120"/>
+              </a:rPr>
+              <a:t>・「保険会社」列が 全行埋まっていて 会社別の色分けがついている</a:t>
+            </a:r>
+            <a:endParaRPr lang="en-US" sz="1400" dirty="0"/>
+          </a:p>
+          <a:p>
+            <a:pPr indent="0" marL="0">
+              <a:spcAft>
+                <a:spcPts val="400"/>
+              </a:spcAft>
+              <a:buNone/>
+            </a:pPr>
+            <a:r>
+              <a:rPr lang="en-US" sz="1400" dirty="0">
+                <a:solidFill>
+                  <a:srgbClr val="1A1A1A"/>
+                </a:solidFill>
+                <a:latin typeface="Yu Gothic UI" pitchFamily="34" charset="0"/>
+                <a:ea typeface="Yu Gothic UI" pitchFamily="34" charset="-122"/>
+                <a:cs typeface="Yu Gothic UI" pitchFamily="34" charset="-120"/>
+              </a:rPr>
+              <a:t>・「情報源」列が全行埋まっている(口伝でもOK、"先輩口伝(要正式化)" と明記)</a:t>
+            </a:r>
+            <a:endParaRPr lang="en-US" sz="1400" dirty="0"/>
+          </a:p>
+          <a:p>
+            <a:pPr indent="0" marL="0">
+              <a:spcAft>
+                <a:spcPts val="400"/>
+              </a:spcAft>
+              <a:buNone/>
+            </a:pPr>
+            <a:r>
+              <a:rPr lang="en-US" sz="1400" dirty="0">
+                <a:solidFill>
+                  <a:srgbClr val="1A1A1A"/>
+                </a:solidFill>
+                <a:latin typeface="Yu Gothic UI" pitchFamily="34" charset="0"/>
+                <a:ea typeface="Yu Gothic UI" pitchFamily="34" charset="-122"/>
+                <a:cs typeface="Yu Gothic UI" pitchFamily="34" charset="-120"/>
+              </a:rPr>
+              <a:t>・NG行の「対応(H列)」に "代替: 〇社" が書けている</a:t>
             </a:r>
             <a:endParaRPr lang="en-US" sz="1400" dirty="0"/>
           </a:p>
@@ -1907,47 +1927,47 @@
                 <a:ea typeface="Yu Gothic UI" pitchFamily="34" charset="-122"/>
                 <a:cs typeface="Yu Gothic UI" pitchFamily="34" charset="-120"/>
               </a:rPr>
-              <a:t>・"口伝" を根拠に書くことを恥ずかしがる生徒がいる。「口伝も立派な情報、隠さず書く」と促す。</a:t>
-            </a:r>
-            <a:endParaRPr lang="en-US" sz="1400" dirty="0"/>
-          </a:p>
-          <a:p>
-            <a:pPr indent="0" marL="0">
-              <a:spcAft>
-                <a:spcPts val="400"/>
-              </a:spcAft>
-              <a:buNone/>
-            </a:pPr>
-            <a:r>
-              <a:rPr lang="en-US" sz="1400" dirty="0">
-                <a:solidFill>
-                  <a:srgbClr val="1A1A1A"/>
-                </a:solidFill>
-                <a:latin typeface="Yu Gothic UI" pitchFamily="34" charset="0"/>
-                <a:ea typeface="Yu Gothic UI" pitchFamily="34" charset="-122"/>
-                <a:cs typeface="Yu Gothic UI" pitchFamily="34" charset="-120"/>
-              </a:rPr>
-              <a:t>・カテゴリの粒度に迷ったら "健康" などざっくりで良い。細かすぎると更新が滞る。</a:t>
-            </a:r>
-            <a:endParaRPr lang="en-US" sz="1400" dirty="0"/>
-          </a:p>
-          <a:p>
-            <a:pPr indent="0" marL="0">
-              <a:spcAft>
-                <a:spcPts val="400"/>
-              </a:spcAft>
-              <a:buNone/>
-            </a:pPr>
-            <a:r>
-              <a:rPr lang="en-US" sz="1400" dirty="0">
-                <a:solidFill>
-                  <a:srgbClr val="1A1A1A"/>
-                </a:solidFill>
-                <a:latin typeface="Yu Gothic UI" pitchFamily="34" charset="0"/>
-                <a:ea typeface="Yu Gothic UI" pitchFamily="34" charset="-122"/>
-                <a:cs typeface="Yu Gothic UI" pitchFamily="34" charset="-120"/>
-              </a:rPr>
-              <a:t>・記入例シートを "そのままコピー" させない。自分の営業対象・自社商品に合わせて書き換えさせる。</a:t>
+              <a:t>・"口伝" を情報源に書くことを恥ずかしがる生徒がいる。「口伝も立派な情報、隠さず書く。後で会社に確認する目印になる」と促す。</a:t>
+            </a:r>
+            <a:endParaRPr lang="en-US" sz="1400" dirty="0"/>
+          </a:p>
+          <a:p>
+            <a:pPr indent="0" marL="0">
+              <a:spcAft>
+                <a:spcPts val="400"/>
+              </a:spcAft>
+              <a:buNone/>
+            </a:pPr>
+            <a:r>
+              <a:rPr lang="en-US" sz="1400" dirty="0">
+                <a:solidFill>
+                  <a:srgbClr val="1A1A1A"/>
+                </a:solidFill>
+                <a:latin typeface="Yu Gothic UI" pitchFamily="34" charset="0"/>
+                <a:ea typeface="Yu Gothic UI" pitchFamily="34" charset="-122"/>
+                <a:cs typeface="Yu Gothic UI" pitchFamily="34" charset="-120"/>
+              </a:rPr>
+              <a:t>・「同じ条件を1行に無理やりまとめる」ミスに注意。会社別に別々の行にするのが代理店マスタの肝。</a:t>
+            </a:r>
+            <a:endParaRPr lang="en-US" sz="1400" dirty="0"/>
+          </a:p>
+          <a:p>
+            <a:pPr indent="0" marL="0">
+              <a:spcAft>
+                <a:spcPts val="400"/>
+              </a:spcAft>
+              <a:buNone/>
+            </a:pPr>
+            <a:r>
+              <a:rPr lang="en-US" sz="1400" dirty="0">
+                <a:solidFill>
+                  <a:srgbClr val="1A1A1A"/>
+                </a:solidFill>
+                <a:latin typeface="Yu Gothic UI" pitchFamily="34" charset="0"/>
+                <a:ea typeface="Yu Gothic UI" pitchFamily="34" charset="-122"/>
+                <a:cs typeface="Yu Gothic UI" pitchFamily="34" charset="-120"/>
+              </a:rPr>
+              <a:t>・記入例シートを "そのままコピー" させない。自分が扱っている代理店契約会社に合わせて書き直させる。</a:t>
             </a:r>
             <a:endParaRPr lang="en-US" sz="1400" dirty="0"/>
           </a:p>
@@ -2038,7 +2058,7 @@
                 <a:ea typeface="Yu Gothic UI Semibold" pitchFamily="34" charset="-122"/>
                 <a:cs typeface="Yu Gothic UI Semibold" pitchFamily="34" charset="-120"/>
               </a:rPr>
-              <a:t>演習2 マスタ表を使った一次判定 と 更新運用 — 解答・指導ポイント</a:t>
+              <a:t>演習2 "どの会社なら通る?" AI一次判定 と 更新運用 — 解答・指導ポイント</a:t>
             </a:r>
             <a:endParaRPr lang="en-US" sz="2600" dirty="0"/>
           </a:p>
@@ -2225,7 +2245,27 @@
                 <a:ea typeface="Yu Gothic UI" pitchFamily="34" charset="-122"/>
                 <a:cs typeface="Yu Gothic UI" pitchFamily="34" charset="-120"/>
               </a:rPr>
-              <a:t>「以下はうちの保険引受判定マスタ表(CSV)です。</a:t>
+              <a:t>「あなたは保険代理店の "事前引受スクリーニングAI" です。</a:t>
+            </a:r>
+            <a:endParaRPr lang="en-US" sz="1400" dirty="0"/>
+          </a:p>
+          <a:p>
+            <a:pPr indent="0" marL="0">
+              <a:spcAft>
+                <a:spcPts val="400"/>
+              </a:spcAft>
+              <a:buNone/>
+            </a:pPr>
+            <a:r>
+              <a:rPr lang="en-US" sz="1400" dirty="0">
+                <a:solidFill>
+                  <a:srgbClr val="1A1A1A"/>
+                </a:solidFill>
+                <a:latin typeface="Yu Gothic UI" pitchFamily="34" charset="0"/>
+                <a:ea typeface="Yu Gothic UI" pitchFamily="34" charset="-122"/>
+                <a:cs typeface="Yu Gothic UI" pitchFamily="34" charset="-120"/>
+              </a:rPr>
+              <a:t>以下は うちの代理店が扱う各社の引受判定マスタ表(CSV)です。</a:t>
             </a:r>
             <a:endParaRPr lang="en-US" sz="1400" dirty="0"/>
           </a:p>
@@ -2274,27 +2314,27 @@
                 <a:ea typeface="Yu Gothic UI" pitchFamily="34" charset="-122"/>
                 <a:cs typeface="Yu Gothic UI" pitchFamily="34" charset="-120"/>
               </a:rPr>
-              <a:t>これをルールとして、次の顧客について 一次判定 してください。</a:t>
-            </a:r>
-            <a:endParaRPr lang="en-US" sz="1400" dirty="0"/>
-          </a:p>
-          <a:p>
-            <a:pPr indent="0" marL="0">
-              <a:spcAft>
-                <a:spcPts val="400"/>
-              </a:spcAft>
-              <a:buNone/>
-            </a:pPr>
-            <a:r>
-              <a:rPr lang="en-US" sz="1400" dirty="0">
-                <a:solidFill>
-                  <a:srgbClr val="1A1A1A"/>
-                </a:solidFill>
-                <a:latin typeface="Yu Gothic UI" pitchFamily="34" charset="0"/>
-                <a:ea typeface="Yu Gothic UI" pitchFamily="34" charset="-122"/>
-                <a:cs typeface="Yu Gothic UI" pitchFamily="34" charset="-120"/>
-              </a:rPr>
-              <a:t>- 顧客: 45歳男性 / 高血圧治療中(1年経過、コントロール良好) / 医療保険希望</a:t>
+              <a:t>これをルールとして、次の顧客について "どの会社の どの商品なら通りそうか" を判定してください。</a:t>
+            </a:r>
+            <a:endParaRPr lang="en-US" sz="1400" dirty="0"/>
+          </a:p>
+          <a:p>
+            <a:pPr indent="0" marL="0">
+              <a:spcAft>
+                <a:spcPts val="400"/>
+              </a:spcAft>
+              <a:buNone/>
+            </a:pPr>
+            <a:r>
+              <a:rPr lang="en-US" sz="1400" dirty="0">
+                <a:solidFill>
+                  <a:srgbClr val="1A1A1A"/>
+                </a:solidFill>
+                <a:latin typeface="Yu Gothic UI" pitchFamily="34" charset="0"/>
+                <a:ea typeface="Yu Gothic UI" pitchFamily="34" charset="-122"/>
+                <a:cs typeface="Yu Gothic UI" pitchFamily="34" charset="-120"/>
+              </a:rPr>
+              <a:t>- 顧客: 45歳男性 / 高血圧治療中(1年経過、収縮期185mmHg) / 医療保険希望</a:t>
             </a:r>
             <a:endParaRPr lang="en-US" sz="1400" dirty="0"/>
           </a:p>
@@ -2343,107 +2383,156 @@
                 <a:ea typeface="Yu Gothic UI" pitchFamily="34" charset="-122"/>
                 <a:cs typeface="Yu Gothic UI" pitchFamily="34" charset="-120"/>
               </a:rPr>
-              <a:t>- 参照した条件ID: RULE-XXX</a:t>
-            </a:r>
-            <a:endParaRPr lang="en-US" sz="1400" dirty="0"/>
-          </a:p>
-          <a:p>
-            <a:pPr indent="0" marL="0">
-              <a:spcAft>
-                <a:spcPts val="400"/>
-              </a:spcAft>
-              <a:buNone/>
-            </a:pPr>
-            <a:r>
-              <a:rPr lang="en-US" sz="1400" dirty="0">
-                <a:solidFill>
-                  <a:srgbClr val="1A1A1A"/>
-                </a:solidFill>
-                <a:latin typeface="Yu Gothic UI" pitchFamily="34" charset="0"/>
-                <a:ea typeface="Yu Gothic UI" pitchFamily="34" charset="-122"/>
-                <a:cs typeface="Yu Gothic UI" pitchFamily="34" charset="-120"/>
-              </a:rPr>
-              <a:t>- 判定: YES / YES(条件付) / 要確認 / NO</a:t>
-            </a:r>
-            <a:endParaRPr lang="en-US" sz="1400" dirty="0"/>
-          </a:p>
-          <a:p>
-            <a:pPr indent="0" marL="0">
-              <a:spcAft>
-                <a:spcPts val="400"/>
-              </a:spcAft>
-              <a:buNone/>
-            </a:pPr>
-            <a:r>
-              <a:rPr lang="en-US" sz="1400" dirty="0">
-                <a:solidFill>
-                  <a:srgbClr val="1A1A1A"/>
-                </a:solidFill>
-                <a:latin typeface="Yu Gothic UI" pitchFamily="34" charset="0"/>
-                <a:ea typeface="Yu Gothic UI" pitchFamily="34" charset="-122"/>
-                <a:cs typeface="Yu Gothic UI" pitchFamily="34" charset="-120"/>
-              </a:rPr>
-              <a:t>- 理由: 1〜2文</a:t>
-            </a:r>
-            <a:endParaRPr lang="en-US" sz="1400" dirty="0"/>
-          </a:p>
-          <a:p>
-            <a:pPr indent="0" marL="0">
-              <a:spcAft>
-                <a:spcPts val="400"/>
-              </a:spcAft>
-              <a:buNone/>
-            </a:pPr>
-            <a:r>
-              <a:rPr lang="en-US" sz="1400" dirty="0">
-                <a:solidFill>
-                  <a:srgbClr val="1A1A1A"/>
-                </a:solidFill>
-                <a:latin typeface="Yu Gothic UI" pitchFamily="34" charset="0"/>
-                <a:ea typeface="Yu Gothic UI" pitchFamily="34" charset="-122"/>
-                <a:cs typeface="Yu Gothic UI" pitchFamily="34" charset="-120"/>
-              </a:rPr>
-              <a:t>- 次のアクション: 顧客への説明/確認項目/エスカレ先</a:t>
-            </a:r>
-            <a:endParaRPr lang="en-US" sz="1400" dirty="0"/>
-          </a:p>
-          <a:p>
-            <a:pPr indent="0" marL="0">
-              <a:spcAft>
-                <a:spcPts val="400"/>
-              </a:spcAft>
-              <a:buNone/>
-            </a:pPr>
-            <a:r>
-              <a:rPr lang="en-US" sz="1400" dirty="0">
-                <a:solidFill>
-                  <a:srgbClr val="1A1A1A"/>
-                </a:solidFill>
-                <a:latin typeface="Yu Gothic UI" pitchFamily="34" charset="0"/>
-                <a:ea typeface="Yu Gothic UI" pitchFamily="34" charset="-122"/>
-                <a:cs typeface="Yu Gothic UI" pitchFamily="34" charset="-120"/>
-              </a:rPr>
-              <a:t>該当ルールがない場合は "該当なし → 要確認 (人が判定)" と返してください。</a:t>
-            </a:r>
-            <a:endParaRPr lang="en-US" sz="1400" dirty="0"/>
-          </a:p>
-          <a:p>
-            <a:pPr indent="0" marL="0">
-              <a:spcAft>
-                <a:spcPts val="400"/>
-              </a:spcAft>
-              <a:buNone/>
-            </a:pPr>
-            <a:r>
-              <a:rPr lang="en-US" sz="1400" dirty="0">
-                <a:solidFill>
-                  <a:srgbClr val="1A1A1A"/>
-                </a:solidFill>
-                <a:latin typeface="Yu Gothic UI" pitchFamily="34" charset="0"/>
-                <a:ea typeface="Yu Gothic UI" pitchFamily="34" charset="-122"/>
-                <a:cs typeface="Yu Gothic UI" pitchFamily="34" charset="-120"/>
-              </a:rPr>
-              <a:t>最終判断は引受査定課が行います。」</a:t>
+              <a:t>- 検討した条件: (どの条件詳細に該当するか)</a:t>
+            </a:r>
+            <a:endParaRPr lang="en-US" sz="1400" dirty="0"/>
+          </a:p>
+          <a:p>
+            <a:pPr indent="0" marL="0">
+              <a:spcAft>
+                <a:spcPts val="400"/>
+              </a:spcAft>
+              <a:buNone/>
+            </a:pPr>
+            <a:r>
+              <a:rPr lang="en-US" sz="1400" dirty="0">
+                <a:solidFill>
+                  <a:srgbClr val="1A1A1A"/>
+                </a:solidFill>
+                <a:latin typeface="Yu Gothic UI" pitchFamily="34" charset="0"/>
+                <a:ea typeface="Yu Gothic UI" pitchFamily="34" charset="-122"/>
+                <a:cs typeface="Yu Gothic UI" pitchFamily="34" charset="-120"/>
+              </a:rPr>
+              <a:t>- 通りそうな会社(YES): 会社名 + 商品ジャンル + 条件ID</a:t>
+            </a:r>
+            <a:endParaRPr lang="en-US" sz="1400" dirty="0"/>
+          </a:p>
+          <a:p>
+            <a:pPr indent="0" marL="0">
+              <a:spcAft>
+                <a:spcPts val="400"/>
+              </a:spcAft>
+              <a:buNone/>
+            </a:pPr>
+            <a:r>
+              <a:rPr lang="en-US" sz="1400" dirty="0">
+                <a:solidFill>
+                  <a:srgbClr val="1A1A1A"/>
+                </a:solidFill>
+                <a:latin typeface="Yu Gothic UI" pitchFamily="34" charset="0"/>
+                <a:ea typeface="Yu Gothic UI" pitchFamily="34" charset="-122"/>
+                <a:cs typeface="Yu Gothic UI" pitchFamily="34" charset="-120"/>
+              </a:rPr>
+              <a:t>- 要確認で相談推奨: 会社名 + 商品ジャンル + 条件ID + どんな追加確認が必要か</a:t>
+            </a:r>
+            <a:endParaRPr lang="en-US" sz="1400" dirty="0"/>
+          </a:p>
+          <a:p>
+            <a:pPr indent="0" marL="0">
+              <a:spcAft>
+                <a:spcPts val="400"/>
+              </a:spcAft>
+              <a:buNone/>
+            </a:pPr>
+            <a:r>
+              <a:rPr lang="en-US" sz="1400" dirty="0">
+                <a:solidFill>
+                  <a:srgbClr val="1A1A1A"/>
+                </a:solidFill>
+                <a:latin typeface="Yu Gothic UI" pitchFamily="34" charset="0"/>
+                <a:ea typeface="Yu Gothic UI" pitchFamily="34" charset="-122"/>
+                <a:cs typeface="Yu Gothic UI" pitchFamily="34" charset="-120"/>
+              </a:rPr>
+              <a:t>- 引受不可(NG): 会社名 + 商品ジャンル + 条件ID</a:t>
+            </a:r>
+            <a:endParaRPr lang="en-US" sz="1400" dirty="0"/>
+          </a:p>
+          <a:p>
+            <a:pPr indent="0" marL="0">
+              <a:spcAft>
+                <a:spcPts val="400"/>
+              </a:spcAft>
+              <a:buNone/>
+            </a:pPr>
+            <a:r>
+              <a:rPr lang="en-US" sz="1400" dirty="0">
+                <a:solidFill>
+                  <a:srgbClr val="1A1A1A"/>
+                </a:solidFill>
+                <a:latin typeface="Yu Gothic UI" pitchFamily="34" charset="0"/>
+                <a:ea typeface="Yu Gothic UI" pitchFamily="34" charset="-122"/>
+                <a:cs typeface="Yu Gothic UI" pitchFamily="34" charset="-120"/>
+              </a:rPr>
+              <a:t>- 代替提案: (該当がない場合、緩和型など次の一手)</a:t>
+            </a:r>
+            <a:endParaRPr lang="en-US" sz="1400" dirty="0"/>
+          </a:p>
+          <a:p>
+            <a:pPr indent="0" marL="0">
+              <a:spcAft>
+                <a:spcPts val="400"/>
+              </a:spcAft>
+              <a:buNone/>
+            </a:pPr>
+            <a:r>
+              <a:rPr lang="en-US" sz="1400" dirty="0">
+                <a:solidFill>
+                  <a:srgbClr val="1A1A1A"/>
+                </a:solidFill>
+                <a:latin typeface="Yu Gothic UI" pitchFamily="34" charset="0"/>
+                <a:ea typeface="Yu Gothic UI" pitchFamily="34" charset="-122"/>
+                <a:cs typeface="Yu Gothic UI" pitchFamily="34" charset="-120"/>
+              </a:rPr>
+              <a:t>- 次のアクション: どの会社の営業担当に事前相談すべきか</a:t>
+            </a:r>
+            <a:endParaRPr lang="en-US" sz="1400" dirty="0"/>
+          </a:p>
+          <a:p>
+            <a:pPr indent="0" marL="0">
+              <a:spcAft>
+                <a:spcPts val="400"/>
+              </a:spcAft>
+              <a:buNone/>
+            </a:pPr>
+            <a:endParaRPr lang="en-US" sz="1400" dirty="0"/>
+          </a:p>
+          <a:p>
+            <a:pPr indent="0" marL="0">
+              <a:spcAft>
+                <a:spcPts val="400"/>
+              </a:spcAft>
+              <a:buNone/>
+            </a:pPr>
+            <a:r>
+              <a:rPr lang="en-US" sz="1400" dirty="0">
+                <a:solidFill>
+                  <a:srgbClr val="1A1A1A"/>
+                </a:solidFill>
+                <a:latin typeface="Yu Gothic UI" pitchFamily="34" charset="0"/>
+                <a:ea typeface="Yu Gothic UI" pitchFamily="34" charset="-122"/>
+                <a:cs typeface="Yu Gothic UI" pitchFamily="34" charset="-120"/>
+              </a:rPr>
+              <a:t>該当ルールがない場合は "該当なし → 各社支社に事前相談要" と返してください。</a:t>
+            </a:r>
+            <a:endParaRPr lang="en-US" sz="1400" dirty="0"/>
+          </a:p>
+          <a:p>
+            <a:pPr indent="0" marL="0">
+              <a:spcAft>
+                <a:spcPts val="400"/>
+              </a:spcAft>
+              <a:buNone/>
+            </a:pPr>
+            <a:r>
+              <a:rPr lang="en-US" sz="1400" dirty="0">
+                <a:solidFill>
+                  <a:srgbClr val="1A1A1A"/>
+                </a:solidFill>
+                <a:latin typeface="Yu Gothic UI" pitchFamily="34" charset="0"/>
+                <a:ea typeface="Yu Gothic UI" pitchFamily="34" charset="-122"/>
+                <a:cs typeface="Yu Gothic UI" pitchFamily="34" charset="-120"/>
+              </a:rPr>
+              <a:t>最終判定は各保険会社が行います。」</a:t>
             </a:r>
             <a:endParaRPr lang="en-US" sz="1400" dirty="0"/>
           </a:p>
@@ -2492,7 +2581,7 @@
                 <a:ea typeface="Yu Gothic UI" pitchFamily="34" charset="-122"/>
                 <a:cs typeface="Yu Gothic UI" pitchFamily="34" charset="-120"/>
               </a:rPr>
-              <a:t>「顧客: 30歳男性 / パラグライダー競技選手 / 死亡保険」を投げて "該当なし → 要確認" が返るか確認。</a:t>
+              <a:t>「顧客: 30歳男性 / パラグライダー競技選手 / 死亡保険」を投げて "該当なし → 各社支社に事前相談要" が返るか確認。</a:t>
             </a:r>
             <a:endParaRPr lang="en-US" sz="1400" dirty="0"/>
           </a:p>
@@ -2620,67 +2709,87 @@
                 <a:ea typeface="Yu Gothic UI" pitchFamily="34" charset="-122"/>
                 <a:cs typeface="Yu Gothic UI" pitchFamily="34" charset="-120"/>
               </a:rPr>
-              <a:t>・3件の顧客について 一次判定 が動く</a:t>
-            </a:r>
-            <a:endParaRPr lang="en-US" sz="1400" dirty="0"/>
-          </a:p>
-          <a:p>
-            <a:pPr indent="0" marL="0">
-              <a:spcAft>
-                <a:spcPts val="400"/>
-              </a:spcAft>
-              <a:buNone/>
-            </a:pPr>
-            <a:r>
-              <a:rPr lang="en-US" sz="1400" dirty="0">
-                <a:solidFill>
-                  <a:srgbClr val="1A1A1A"/>
-                </a:solidFill>
-                <a:latin typeface="Yu Gothic UI" pitchFamily="34" charset="0"/>
-                <a:ea typeface="Yu Gothic UI" pitchFamily="34" charset="-122"/>
-                <a:cs typeface="Yu Gothic UI" pitchFamily="34" charset="-120"/>
-              </a:rPr>
-              <a:t>・全ての判定に "参照条件ID" が付いている</a:t>
-            </a:r>
-            <a:endParaRPr lang="en-US" sz="1400" dirty="0"/>
-          </a:p>
-          <a:p>
-            <a:pPr indent="0" marL="0">
-              <a:spcAft>
-                <a:spcPts val="400"/>
-              </a:spcAft>
-              <a:buNone/>
-            </a:pPr>
-            <a:r>
-              <a:rPr lang="en-US" sz="1400" dirty="0">
-                <a:solidFill>
-                  <a:srgbClr val="1A1A1A"/>
-                </a:solidFill>
-                <a:latin typeface="Yu Gothic UI" pitchFamily="34" charset="0"/>
-                <a:ea typeface="Yu Gothic UI" pitchFamily="34" charset="-122"/>
-                <a:cs typeface="Yu Gothic UI" pitchFamily="34" charset="-120"/>
-              </a:rPr>
-              <a:t>・該当なしテストで "自動 YES" にならず要確認になる</a:t>
-            </a:r>
-            <a:endParaRPr lang="en-US" sz="1400" dirty="0"/>
-          </a:p>
-          <a:p>
-            <a:pPr indent="0" marL="0">
-              <a:spcAft>
-                <a:spcPts val="400"/>
-              </a:spcAft>
-              <a:buNone/>
-            </a:pPr>
-            <a:r>
-              <a:rPr lang="en-US" sz="1400" dirty="0">
-                <a:solidFill>
-                  <a:srgbClr val="1A1A1A"/>
-                </a:solidFill>
-                <a:latin typeface="Yu Gothic UI" pitchFamily="34" charset="0"/>
-                <a:ea typeface="Yu Gothic UI" pitchFamily="34" charset="-122"/>
-                <a:cs typeface="Yu Gothic UI" pitchFamily="34" charset="-120"/>
-              </a:rPr>
-              <a:t>・更新ログシートに 2件のダミー更新が入っている</a:t>
+              <a:t>・3件の顧客について 会社別の一次判定 が動く</a:t>
+            </a:r>
+            <a:endParaRPr lang="en-US" sz="1400" dirty="0"/>
+          </a:p>
+          <a:p>
+            <a:pPr indent="0" marL="0">
+              <a:spcAft>
+                <a:spcPts val="400"/>
+              </a:spcAft>
+              <a:buNone/>
+            </a:pPr>
+            <a:r>
+              <a:rPr lang="en-US" sz="1400" dirty="0">
+                <a:solidFill>
+                  <a:srgbClr val="1A1A1A"/>
+                </a:solidFill>
+                <a:latin typeface="Yu Gothic UI" pitchFamily="34" charset="0"/>
+                <a:ea typeface="Yu Gothic UI" pitchFamily="34" charset="-122"/>
+                <a:cs typeface="Yu Gothic UI" pitchFamily="34" charset="-120"/>
+              </a:rPr>
+              <a:t>・全ての判定に "参照条件ID" と "会社名" が付いている</a:t>
+            </a:r>
+            <a:endParaRPr lang="en-US" sz="1400" dirty="0"/>
+          </a:p>
+          <a:p>
+            <a:pPr indent="0" marL="0">
+              <a:spcAft>
+                <a:spcPts val="400"/>
+              </a:spcAft>
+              <a:buNone/>
+            </a:pPr>
+            <a:r>
+              <a:rPr lang="en-US" sz="1400" dirty="0">
+                <a:solidFill>
+                  <a:srgbClr val="1A1A1A"/>
+                </a:solidFill>
+                <a:latin typeface="Yu Gothic UI" pitchFamily="34" charset="0"/>
+                <a:ea typeface="Yu Gothic UI" pitchFamily="34" charset="-122"/>
+                <a:cs typeface="Yu Gothic UI" pitchFamily="34" charset="-120"/>
+              </a:rPr>
+              <a:t>・NG会社の代替として "代替: 〇社なら通る可能性" が出る</a:t>
+            </a:r>
+            <a:endParaRPr lang="en-US" sz="1400" dirty="0"/>
+          </a:p>
+          <a:p>
+            <a:pPr indent="0" marL="0">
+              <a:spcAft>
+                <a:spcPts val="400"/>
+              </a:spcAft>
+              <a:buNone/>
+            </a:pPr>
+            <a:r>
+              <a:rPr lang="en-US" sz="1400" dirty="0">
+                <a:solidFill>
+                  <a:srgbClr val="1A1A1A"/>
+                </a:solidFill>
+                <a:latin typeface="Yu Gothic UI" pitchFamily="34" charset="0"/>
+                <a:ea typeface="Yu Gothic UI" pitchFamily="34" charset="-122"/>
+                <a:cs typeface="Yu Gothic UI" pitchFamily="34" charset="-120"/>
+              </a:rPr>
+              <a:t>・該当なしテストで "自動 YES" にならず "各社支社に事前相談要" になる</a:t>
+            </a:r>
+            <a:endParaRPr lang="en-US" sz="1400" dirty="0"/>
+          </a:p>
+          <a:p>
+            <a:pPr indent="0" marL="0">
+              <a:spcAft>
+                <a:spcPts val="400"/>
+              </a:spcAft>
+              <a:buNone/>
+            </a:pPr>
+            <a:r>
+              <a:rPr lang="en-US" sz="1400" dirty="0">
+                <a:solidFill>
+                  <a:srgbClr val="1A1A1A"/>
+                </a:solidFill>
+                <a:latin typeface="Yu Gothic UI" pitchFamily="34" charset="0"/>
+                <a:ea typeface="Yu Gothic UI" pitchFamily="34" charset="-122"/>
+                <a:cs typeface="Yu Gothic UI" pitchFamily="34" charset="-120"/>
+              </a:rPr>
+              <a:t>・更新ログシートに 2件のダミー更新(各社の改定情報反映)が入っている</a:t>
             </a:r>
             <a:endParaRPr lang="en-US" sz="1400" dirty="0"/>
           </a:p>
@@ -2828,67 +2937,87 @@
                 <a:ea typeface="Yu Gothic UI" pitchFamily="34" charset="-122"/>
                 <a:cs typeface="Yu Gothic UI" pitchFamily="34" charset="-120"/>
               </a:rPr>
-              <a:t>・「該当なし = YES」に AI がしないよう、"該当なし = 要確認" を必ずプロンプトに書かせる。</a:t>
-            </a:r>
-            <a:endParaRPr lang="en-US" sz="1400" dirty="0"/>
-          </a:p>
-          <a:p>
-            <a:pPr indent="0" marL="0">
-              <a:spcAft>
-                <a:spcPts val="400"/>
-              </a:spcAft>
-              <a:buNone/>
-            </a:pPr>
-            <a:r>
-              <a:rPr lang="en-US" sz="1400" dirty="0">
-                <a:solidFill>
-                  <a:srgbClr val="1A1A1A"/>
-                </a:solidFill>
-                <a:latin typeface="Yu Gothic UI" pitchFamily="34" charset="0"/>
-                <a:ea typeface="Yu Gothic UI" pitchFamily="34" charset="-122"/>
-                <a:cs typeface="Yu Gothic UI" pitchFamily="34" charset="-120"/>
-              </a:rPr>
-              <a:t>・条件IDを出力に含める運用が重要。後で "なぜこの判定?" の監査ができる。</a:t>
-            </a:r>
-            <a:endParaRPr lang="en-US" sz="1400" dirty="0"/>
-          </a:p>
-          <a:p>
-            <a:pPr indent="0" marL="0">
-              <a:spcAft>
-                <a:spcPts val="400"/>
-              </a:spcAft>
-              <a:buNone/>
-            </a:pPr>
-            <a:r>
-              <a:rPr lang="en-US" sz="1400" dirty="0">
-                <a:solidFill>
-                  <a:srgbClr val="1A1A1A"/>
-                </a:solidFill>
-                <a:latin typeface="Yu Gothic UI" pitchFamily="34" charset="0"/>
-                <a:ea typeface="Yu Gothic UI" pitchFamily="34" charset="-122"/>
-                <a:cs typeface="Yu Gothic UI" pitchFamily="34" charset="-120"/>
-              </a:rPr>
-              <a:t>・"削除" 運用は禁止(履歴が失われる)。無効化列を追加する運用に統一。</a:t>
-            </a:r>
-            <a:endParaRPr lang="en-US" sz="1400" dirty="0"/>
-          </a:p>
-          <a:p>
-            <a:pPr indent="0" marL="0">
-              <a:spcAft>
-                <a:spcPts val="400"/>
-              </a:spcAft>
-              <a:buNone/>
-            </a:pPr>
-            <a:r>
-              <a:rPr lang="en-US" sz="1400" dirty="0">
-                <a:solidFill>
-                  <a:srgbClr val="1A1A1A"/>
-                </a:solidFill>
-                <a:latin typeface="Yu Gothic UI" pitchFamily="34" charset="0"/>
-                <a:ea typeface="Yu Gothic UI" pitchFamily="34" charset="-122"/>
-                <a:cs typeface="Yu Gothic UI" pitchFamily="34" charset="-120"/>
-              </a:rPr>
-              <a:t>・月1回15分の見直しでも十分。時間より "続くこと" が重要と伝える。</a:t>
+              <a:t>・「該当なし = YES」に AI がしないよう、"該当なし = 各社支社に事前相談要" を必ずプロンプトに書かせる。</a:t>
+            </a:r>
+            <a:endParaRPr lang="en-US" sz="1400" dirty="0"/>
+          </a:p>
+          <a:p>
+            <a:pPr indent="0" marL="0">
+              <a:spcAft>
+                <a:spcPts val="400"/>
+              </a:spcAft>
+              <a:buNone/>
+            </a:pPr>
+            <a:r>
+              <a:rPr lang="en-US" sz="1400" dirty="0">
+                <a:solidFill>
+                  <a:srgbClr val="1A1A1A"/>
+                </a:solidFill>
+                <a:latin typeface="Yu Gothic UI" pitchFamily="34" charset="0"/>
+                <a:ea typeface="Yu Gothic UI" pitchFamily="34" charset="-122"/>
+                <a:cs typeface="Yu Gothic UI" pitchFamily="34" charset="-120"/>
+              </a:rPr>
+              <a:t>・出力には 必ず "会社名 + 条件ID" を含めさせる。後で "なぜこの見立て?" の監査ができる。</a:t>
+            </a:r>
+            <a:endParaRPr lang="en-US" sz="1400" dirty="0"/>
+          </a:p>
+          <a:p>
+            <a:pPr indent="0" marL="0">
+              <a:spcAft>
+                <a:spcPts val="400"/>
+              </a:spcAft>
+              <a:buNone/>
+            </a:pPr>
+            <a:r>
+              <a:rPr lang="en-US" sz="1400" dirty="0">
+                <a:solidFill>
+                  <a:srgbClr val="1A1A1A"/>
+                </a:solidFill>
+                <a:latin typeface="Yu Gothic UI" pitchFamily="34" charset="0"/>
+                <a:ea typeface="Yu Gothic UI" pitchFamily="34" charset="-122"/>
+                <a:cs typeface="Yu Gothic UI" pitchFamily="34" charset="-120"/>
+              </a:rPr>
+              <a:t>・「NG会社しか出ない場合の代替提案」を必ず出させる。それが代理店の付加価値。</a:t>
+            </a:r>
+            <a:endParaRPr lang="en-US" sz="1400" dirty="0"/>
+          </a:p>
+          <a:p>
+            <a:pPr indent="0" marL="0">
+              <a:spcAft>
+                <a:spcPts val="400"/>
+              </a:spcAft>
+              <a:buNone/>
+            </a:pPr>
+            <a:r>
+              <a:rPr lang="en-US" sz="1400" dirty="0">
+                <a:solidFill>
+                  <a:srgbClr val="1A1A1A"/>
+                </a:solidFill>
+                <a:latin typeface="Yu Gothic UI" pitchFamily="34" charset="0"/>
+                <a:ea typeface="Yu Gothic UI" pitchFamily="34" charset="-122"/>
+                <a:cs typeface="Yu Gothic UI" pitchFamily="34" charset="-120"/>
+              </a:rPr>
+              <a:t>・"削除" 運用は禁止(過去顧客への説明時に必要)。無効化列で対応。</a:t>
+            </a:r>
+            <a:endParaRPr lang="en-US" sz="1400" dirty="0"/>
+          </a:p>
+          <a:p>
+            <a:pPr indent="0" marL="0">
+              <a:spcAft>
+                <a:spcPts val="400"/>
+              </a:spcAft>
+              <a:buNone/>
+            </a:pPr>
+            <a:r>
+              <a:rPr lang="en-US" sz="1400" dirty="0">
+                <a:solidFill>
+                  <a:srgbClr val="1A1A1A"/>
+                </a:solidFill>
+                <a:latin typeface="Yu Gothic UI" pitchFamily="34" charset="0"/>
+                <a:ea typeface="Yu Gothic UI" pitchFamily="34" charset="-122"/>
+                <a:cs typeface="Yu Gothic UI" pitchFamily="34" charset="-120"/>
+              </a:rPr>
+              <a:t>・月1回15分の見直しでも十分。「田中さんが毎月第1金曜に各社営業担当へ一斉ヒアリング」など具体的に決めさせる。</a:t>
             </a:r>
             <a:endParaRPr lang="en-US" sz="1400" dirty="0"/>
           </a:p>

--- a/lecture_pptx/out/s15/ワーク01_講師用.pptx
+++ b/lecture_pptx/out/s15/ワーク01_講師用.pptx
@@ -1106,7 +1106,7 @@
                 <a:ea typeface="Yu Gothic UI Semibold" pitchFamily="34" charset="-122"/>
                 <a:cs typeface="Yu Gothic UI Semibold" pitchFamily="34" charset="-120"/>
               </a:rPr>
-              <a:t>代理店の "事前引受スクリーニング" を マスタ表化する</a:t>
+              <a:t>扱い商品ごとの "引受判定" マスタ表を作る</a:t>
             </a:r>
             <a:endParaRPr lang="en-US" sz="3800" dirty="0"/>
           </a:p>
@@ -1145,7 +1145,7 @@
                 <a:ea typeface="Yu Gothic UI" pitchFamily="34" charset="-122"/>
                 <a:cs typeface="Yu Gothic UI" pitchFamily="34" charset="-120"/>
               </a:rPr>
-              <a:t>扱う各社の引受基準を1つの表に整理し、AIで "どの会社なら通りそうか" を申込前に見立てる</a:t>
+              <a:t>代理店が扱う商品ごとに引受条件をメモ集約し、"この顧客はこの商品で通るか?" を AI で申込前に判定する</a:t>
             </a:r>
             <a:endParaRPr lang="en-US" sz="1900" dirty="0"/>
           </a:p>
@@ -1275,7 +1275,7 @@
                 <a:ea typeface="Yu Gothic UI Semibold" pitchFamily="34" charset="-122"/>
                 <a:cs typeface="Yu Gothic UI Semibold" pitchFamily="34" charset="-120"/>
               </a:rPr>
-              <a:t>演習1 散在ナレッジを 代理店マスタ表 10列に統合 — 解答・指導ポイント</a:t>
+              <a:t>演習1 散在ナレッジを 商品別マスタ表 10列に統合 — 解答・指導ポイント</a:t>
             </a:r>
             <a:endParaRPr lang="en-US" sz="2600" dirty="0"/>
           </a:p>
@@ -1462,67 +1462,67 @@
                 <a:ea typeface="Yu Gothic UI" pitchFamily="34" charset="-122"/>
                 <a:cs typeface="Yu Gothic UI" pitchFamily="34" charset="-120"/>
               </a:rPr>
-              <a:t>・「デモナレッジ01(先輩口伝)の "妊娠中は B社が告知項目なしで通る" を まず1行入れてみて」</a:t>
-            </a:r>
-            <a:endParaRPr lang="en-US" sz="1400" dirty="0"/>
-          </a:p>
-          <a:p>
-            <a:pPr indent="0" marL="0">
-              <a:spcAft>
-                <a:spcPts val="400"/>
-              </a:spcAft>
-              <a:buNone/>
-            </a:pPr>
-            <a:r>
-              <a:rPr lang="en-US" sz="1400" dirty="0">
-                <a:solidFill>
-                  <a:srgbClr val="1A1A1A"/>
-                </a:solidFill>
-                <a:latin typeface="Yu Gothic UI" pitchFamily="34" charset="0"/>
-                <a:ea typeface="Yu Gothic UI" pitchFamily="34" charset="-122"/>
-                <a:cs typeface="Yu Gothic UI" pitchFamily="34" charset="-120"/>
-              </a:rPr>
-              <a:t>・「デモナレッジ02(B社チャット 2024/07/18) にも同じ内容ある?→ 1行に統合、情報源列に両方書く」</a:t>
-            </a:r>
-            <a:endParaRPr lang="en-US" sz="1400" dirty="0"/>
-          </a:p>
-          <a:p>
-            <a:pPr indent="0" marL="0">
-              <a:spcAft>
-                <a:spcPts val="400"/>
-              </a:spcAft>
-              <a:buNone/>
-            </a:pPr>
-            <a:r>
-              <a:rPr lang="en-US" sz="1400" dirty="0">
-                <a:solidFill>
-                  <a:srgbClr val="1A1A1A"/>
-                </a:solidFill>
-                <a:latin typeface="Yu Gothic UI" pitchFamily="34" charset="0"/>
-                <a:ea typeface="Yu Gothic UI" pitchFamily="34" charset="-122"/>
-                <a:cs typeface="Yu Gothic UI" pitchFamily="34" charset="-120"/>
-              </a:rPr>
-              <a:t>・「デモナレッジ03(A社研修)の "妊娠12週未満NG" は A社行として 別の行 に書く」</a:t>
-            </a:r>
-            <a:endParaRPr lang="en-US" sz="1400" dirty="0"/>
-          </a:p>
-          <a:p>
-            <a:pPr indent="0" marL="0">
-              <a:spcAft>
-                <a:spcPts val="400"/>
-              </a:spcAft>
-              <a:buNone/>
-            </a:pPr>
-            <a:r>
-              <a:rPr lang="en-US" sz="1400" dirty="0">
-                <a:solidFill>
-                  <a:srgbClr val="1A1A1A"/>
-                </a:solidFill>
-                <a:latin typeface="Yu Gothic UI" pitchFamily="34" charset="0"/>
-                <a:ea typeface="Yu Gothic UI" pitchFamily="34" charset="-122"/>
-                <a:cs typeface="Yu Gothic UI" pitchFamily="34" charset="-120"/>
-              </a:rPr>
-              <a:t>・「A社NG行の H列に "代替: B社なら告知項目なしで通る" と書いておくと、次の営業で即使える」</a:t>
+              <a:t>・「デモナレッジ01(先輩口伝)の "A社医療プレミアムは高血圧180超NG" を まず1行入れてみて」</a:t>
+            </a:r>
+            <a:endParaRPr lang="en-US" sz="1400" dirty="0"/>
+          </a:p>
+          <a:p>
+            <a:pPr indent="0" marL="0">
+              <a:spcAft>
+                <a:spcPts val="400"/>
+              </a:spcAft>
+              <a:buNone/>
+            </a:pPr>
+            <a:r>
+              <a:rPr lang="en-US" sz="1400" dirty="0">
+                <a:solidFill>
+                  <a:srgbClr val="1A1A1A"/>
+                </a:solidFill>
+                <a:latin typeface="Yu Gothic UI" pitchFamily="34" charset="0"/>
+                <a:ea typeface="Yu Gothic UI" pitchFamily="34" charset="-122"/>
+                <a:cs typeface="Yu Gothic UI" pitchFamily="34" charset="-120"/>
+              </a:rPr>
+              <a:t>・「デモナレッジ03(A社研修 §3.2)にも同じ内容ある?→ 1行に統合、情報源列に両方書く」</a:t>
+            </a:r>
+            <a:endParaRPr lang="en-US" sz="1400" dirty="0"/>
+          </a:p>
+          <a:p>
+            <a:pPr indent="0" marL="0">
+              <a:spcAft>
+                <a:spcPts val="400"/>
+              </a:spcAft>
+              <a:buNone/>
+            </a:pPr>
+            <a:r>
+              <a:rPr lang="en-US" sz="1400" dirty="0">
+                <a:solidFill>
+                  <a:srgbClr val="1A1A1A"/>
+                </a:solidFill>
+                <a:latin typeface="Yu Gothic UI" pitchFamily="34" charset="0"/>
+                <a:ea typeface="Yu Gothic UI" pitchFamily="34" charset="-122"/>
+                <a:cs typeface="Yu Gothic UI" pitchFamily="34" charset="-120"/>
+              </a:rPr>
+              <a:t>・「同じ "妊娠12週未満" の条件、A社医療プレミアムは NG行、B社医療スタンダードは YES行 の 別々の行 に」</a:t>
+            </a:r>
+            <a:endParaRPr lang="en-US" sz="1400" dirty="0"/>
+          </a:p>
+          <a:p>
+            <a:pPr indent="0" marL="0">
+              <a:spcAft>
+                <a:spcPts val="400"/>
+              </a:spcAft>
+              <a:buNone/>
+            </a:pPr>
+            <a:r>
+              <a:rPr lang="en-US" sz="1400" dirty="0">
+                <a:solidFill>
+                  <a:srgbClr val="1A1A1A"/>
+                </a:solidFill>
+                <a:latin typeface="Yu Gothic UI" pitchFamily="34" charset="0"/>
+                <a:ea typeface="Yu Gothic UI" pitchFamily="34" charset="-122"/>
+                <a:cs typeface="Yu Gothic UI" pitchFamily="34" charset="-120"/>
+              </a:rPr>
+              <a:t>・「NG行の H列(対応)に "代替: D社医療ライト(緩和型)を検討 or 血圧安定後に再申込" と書くと、次の営業で即使える」</a:t>
             </a:r>
             <a:endParaRPr lang="en-US" sz="1400" dirty="0"/>
           </a:p>
@@ -1571,7 +1571,7 @@
                 <a:ea typeface="Yu Gothic UI" pitchFamily="34" charset="-122"/>
                 <a:cs typeface="Yu Gothic UI" pitchFamily="34" charset="-120"/>
               </a:rPr>
-              <a:t>「以下は保険代理店の情報源です。ここから引受判定条件を抽出して、10列の代理店マスタ表(条件ID/カテゴリ/保険会社/商品ジャンル/条件詳細/判定/理由/対応or代替候補社/情報源/更新日)にJSONで整理して。同じ条件でも会社で判定が違う場合は 別々の行にしてください。</a:t>
+              <a:t>「以下は保険代理店の情報源です。ここから 商品ごとの引受条件を抽出して、10列のマスタ表(条件ID/保険会社/商品名/カテゴリ/条件詳細/判定/理由/対応/情報源/更新日)にJSONで整理して。同じ条件でも商品が違えば 別々の行 にしてください。</a:t>
             </a:r>
             <a:endParaRPr lang="en-US" sz="1400" dirty="0"/>
           </a:p>
@@ -1719,67 +1719,67 @@
                 <a:ea typeface="Yu Gothic UI" pitchFamily="34" charset="-122"/>
                 <a:cs typeface="Yu Gothic UI" pitchFamily="34" charset="-120"/>
               </a:rPr>
-              <a:t>・引受判定マスタシートに 20〜30 行(2〜4社ぶん)が入っている</a:t>
-            </a:r>
-            <a:endParaRPr lang="en-US" sz="1400" dirty="0"/>
-          </a:p>
-          <a:p>
-            <a:pPr indent="0" marL="0">
-              <a:spcAft>
-                <a:spcPts val="400"/>
-              </a:spcAft>
-              <a:buNone/>
-            </a:pPr>
-            <a:r>
-              <a:rPr lang="en-US" sz="1400" dirty="0">
-                <a:solidFill>
-                  <a:srgbClr val="1A1A1A"/>
-                </a:solidFill>
-                <a:latin typeface="Yu Gothic UI" pitchFamily="34" charset="0"/>
-                <a:ea typeface="Yu Gothic UI" pitchFamily="34" charset="-122"/>
-                <a:cs typeface="Yu Gothic UI" pitchFamily="34" charset="-120"/>
-              </a:rPr>
-              <a:t>・「保険会社」列が 全行埋まっていて 会社別の色分けがついている</a:t>
-            </a:r>
-            <a:endParaRPr lang="en-US" sz="1400" dirty="0"/>
-          </a:p>
-          <a:p>
-            <a:pPr indent="0" marL="0">
-              <a:spcAft>
-                <a:spcPts val="400"/>
-              </a:spcAft>
-              <a:buNone/>
-            </a:pPr>
-            <a:r>
-              <a:rPr lang="en-US" sz="1400" dirty="0">
-                <a:solidFill>
-                  <a:srgbClr val="1A1A1A"/>
-                </a:solidFill>
-                <a:latin typeface="Yu Gothic UI" pitchFamily="34" charset="0"/>
-                <a:ea typeface="Yu Gothic UI" pitchFamily="34" charset="-122"/>
-                <a:cs typeface="Yu Gothic UI" pitchFamily="34" charset="-120"/>
-              </a:rPr>
-              <a:t>・「情報源」列が全行埋まっている(口伝でもOK、"先輩口伝(要正式化)" と明記)</a:t>
-            </a:r>
-            <a:endParaRPr lang="en-US" sz="1400" dirty="0"/>
-          </a:p>
-          <a:p>
-            <a:pPr indent="0" marL="0">
-              <a:spcAft>
-                <a:spcPts val="400"/>
-              </a:spcAft>
-              <a:buNone/>
-            </a:pPr>
-            <a:r>
-              <a:rPr lang="en-US" sz="1400" dirty="0">
-                <a:solidFill>
-                  <a:srgbClr val="1A1A1A"/>
-                </a:solidFill>
-                <a:latin typeface="Yu Gothic UI" pitchFamily="34" charset="0"/>
-                <a:ea typeface="Yu Gothic UI" pitchFamily="34" charset="-122"/>
-                <a:cs typeface="Yu Gothic UI" pitchFamily="34" charset="-120"/>
-              </a:rPr>
-              <a:t>・NG行の「対応(H列)」に "代替: 〇社" が書けている</a:t>
+              <a:t>・引受判定マスタシートに 20〜30 行(5〜7 商品ぶん)が入っている</a:t>
+            </a:r>
+            <a:endParaRPr lang="en-US" sz="1400" dirty="0"/>
+          </a:p>
+          <a:p>
+            <a:pPr indent="0" marL="0">
+              <a:spcAft>
+                <a:spcPts val="400"/>
+              </a:spcAft>
+              <a:buNone/>
+            </a:pPr>
+            <a:r>
+              <a:rPr lang="en-US" sz="1400" dirty="0">
+                <a:solidFill>
+                  <a:srgbClr val="1A1A1A"/>
+                </a:solidFill>
+                <a:latin typeface="Yu Gothic UI" pitchFamily="34" charset="0"/>
+                <a:ea typeface="Yu Gothic UI" pitchFamily="34" charset="-122"/>
+                <a:cs typeface="Yu Gothic UI" pitchFamily="34" charset="-120"/>
+              </a:rPr>
+              <a:t>・「商品名(C列)」でソートすると 同じ商品の行がまとまって "商品カルテ" として見える</a:t>
+            </a:r>
+            <a:endParaRPr lang="en-US" sz="1400" dirty="0"/>
+          </a:p>
+          <a:p>
+            <a:pPr indent="0" marL="0">
+              <a:spcAft>
+                <a:spcPts val="400"/>
+              </a:spcAft>
+              <a:buNone/>
+            </a:pPr>
+            <a:r>
+              <a:rPr lang="en-US" sz="1400" dirty="0">
+                <a:solidFill>
+                  <a:srgbClr val="1A1A1A"/>
+                </a:solidFill>
+                <a:latin typeface="Yu Gothic UI" pitchFamily="34" charset="0"/>
+                <a:ea typeface="Yu Gothic UI" pitchFamily="34" charset="-122"/>
+                <a:cs typeface="Yu Gothic UI" pitchFamily="34" charset="-120"/>
+              </a:rPr>
+              <a:t>・「情報源(I列)」が全行埋まっている(口伝でもOK、"先輩口伝(要正式化)" と明記)</a:t>
+            </a:r>
+            <a:endParaRPr lang="en-US" sz="1400" dirty="0"/>
+          </a:p>
+          <a:p>
+            <a:pPr indent="0" marL="0">
+              <a:spcAft>
+                <a:spcPts val="400"/>
+              </a:spcAft>
+              <a:buNone/>
+            </a:pPr>
+            <a:r>
+              <a:rPr lang="en-US" sz="1400" dirty="0">
+                <a:solidFill>
+                  <a:srgbClr val="1A1A1A"/>
+                </a:solidFill>
+                <a:latin typeface="Yu Gothic UI" pitchFamily="34" charset="0"/>
+                <a:ea typeface="Yu Gothic UI" pitchFamily="34" charset="-122"/>
+                <a:cs typeface="Yu Gothic UI" pitchFamily="34" charset="-120"/>
+              </a:rPr>
+              <a:t>・NG行の「対応(H列)」に "顧客説明 / 再申込タイミング / 代替商品" が書けている</a:t>
             </a:r>
             <a:endParaRPr lang="en-US" sz="1400" dirty="0"/>
           </a:p>
@@ -1927,47 +1927,47 @@
                 <a:ea typeface="Yu Gothic UI" pitchFamily="34" charset="-122"/>
                 <a:cs typeface="Yu Gothic UI" pitchFamily="34" charset="-120"/>
               </a:rPr>
-              <a:t>・"口伝" を情報源に書くことを恥ずかしがる生徒がいる。「口伝も立派な情報、隠さず書く。後で会社に確認する目印になる」と促す。</a:t>
-            </a:r>
-            <a:endParaRPr lang="en-US" sz="1400" dirty="0"/>
-          </a:p>
-          <a:p>
-            <a:pPr indent="0" marL="0">
-              <a:spcAft>
-                <a:spcPts val="400"/>
-              </a:spcAft>
-              <a:buNone/>
-            </a:pPr>
-            <a:r>
-              <a:rPr lang="en-US" sz="1400" dirty="0">
-                <a:solidFill>
-                  <a:srgbClr val="1A1A1A"/>
-                </a:solidFill>
-                <a:latin typeface="Yu Gothic UI" pitchFamily="34" charset="0"/>
-                <a:ea typeface="Yu Gothic UI" pitchFamily="34" charset="-122"/>
-                <a:cs typeface="Yu Gothic UI" pitchFamily="34" charset="-120"/>
-              </a:rPr>
-              <a:t>・「同じ条件を1行に無理やりまとめる」ミスに注意。会社別に別々の行にするのが代理店マスタの肝。</a:t>
-            </a:r>
-            <a:endParaRPr lang="en-US" sz="1400" dirty="0"/>
-          </a:p>
-          <a:p>
-            <a:pPr indent="0" marL="0">
-              <a:spcAft>
-                <a:spcPts val="400"/>
-              </a:spcAft>
-              <a:buNone/>
-            </a:pPr>
-            <a:r>
-              <a:rPr lang="en-US" sz="1400" dirty="0">
-                <a:solidFill>
-                  <a:srgbClr val="1A1A1A"/>
-                </a:solidFill>
-                <a:latin typeface="Yu Gothic UI" pitchFamily="34" charset="0"/>
-                <a:ea typeface="Yu Gothic UI" pitchFamily="34" charset="-122"/>
-                <a:cs typeface="Yu Gothic UI" pitchFamily="34" charset="-120"/>
-              </a:rPr>
-              <a:t>・記入例シートを "そのままコピー" させない。自分が扱っている代理店契約会社に合わせて書き直させる。</a:t>
+              <a:t>・"口伝" を情報源に書くことを恥ずかしがる生徒がいる。「口伝も立派な情報、隠さず書く。後で商品担当に確認する目印になる」と促す。</a:t>
+            </a:r>
+            <a:endParaRPr lang="en-US" sz="1400" dirty="0"/>
+          </a:p>
+          <a:p>
+            <a:pPr indent="0" marL="0">
+              <a:spcAft>
+                <a:spcPts val="400"/>
+              </a:spcAft>
+              <a:buNone/>
+            </a:pPr>
+            <a:r>
+              <a:rPr lang="en-US" sz="1400" dirty="0">
+                <a:solidFill>
+                  <a:srgbClr val="1A1A1A"/>
+                </a:solidFill>
+                <a:latin typeface="Yu Gothic UI" pitchFamily="34" charset="0"/>
+                <a:ea typeface="Yu Gothic UI" pitchFamily="34" charset="-122"/>
+                <a:cs typeface="Yu Gothic UI" pitchFamily="34" charset="-120"/>
+              </a:rPr>
+              <a:t>・「同じ条件を1行に無理やりまとめる」ミスに注意。商品ごとに別々の行にするのが商品カルテの肝。</a:t>
+            </a:r>
+            <a:endParaRPr lang="en-US" sz="1400" dirty="0"/>
+          </a:p>
+          <a:p>
+            <a:pPr indent="0" marL="0">
+              <a:spcAft>
+                <a:spcPts val="400"/>
+              </a:spcAft>
+              <a:buNone/>
+            </a:pPr>
+            <a:r>
+              <a:rPr lang="en-US" sz="1400" dirty="0">
+                <a:solidFill>
+                  <a:srgbClr val="1A1A1A"/>
+                </a:solidFill>
+                <a:latin typeface="Yu Gothic UI" pitchFamily="34" charset="0"/>
+                <a:ea typeface="Yu Gothic UI" pitchFamily="34" charset="-122"/>
+                <a:cs typeface="Yu Gothic UI" pitchFamily="34" charset="-120"/>
+              </a:rPr>
+              <a:t>・記入例シートを "そのままコピー" させない。自分が扱っている商品に合わせて書き直させる。</a:t>
             </a:r>
             <a:endParaRPr lang="en-US" sz="1400" dirty="0"/>
           </a:p>
@@ -2058,7 +2058,7 @@
                 <a:ea typeface="Yu Gothic UI Semibold" pitchFamily="34" charset="-122"/>
                 <a:cs typeface="Yu Gothic UI Semibold" pitchFamily="34" charset="-120"/>
               </a:rPr>
-              <a:t>演習2 "どの会社なら通る?" AI一次判定 と 更新運用 — 解答・指導ポイント</a:t>
+              <a:t>演習2 "この商品で通る?" AI一次判定 と 更新運用 — 解答・指導ポイント</a:t>
             </a:r>
             <a:endParaRPr lang="en-US" sz="2600" dirty="0"/>
           </a:p>
@@ -2245,27 +2245,27 @@
                 <a:ea typeface="Yu Gothic UI" pitchFamily="34" charset="-122"/>
                 <a:cs typeface="Yu Gothic UI" pitchFamily="34" charset="-120"/>
               </a:rPr>
-              <a:t>「あなたは保険代理店の "事前引受スクリーニングAI" です。</a:t>
-            </a:r>
-            <a:endParaRPr lang="en-US" sz="1400" dirty="0"/>
-          </a:p>
-          <a:p>
-            <a:pPr indent="0" marL="0">
-              <a:spcAft>
-                <a:spcPts val="400"/>
-              </a:spcAft>
-              <a:buNone/>
-            </a:pPr>
-            <a:r>
-              <a:rPr lang="en-US" sz="1400" dirty="0">
-                <a:solidFill>
-                  <a:srgbClr val="1A1A1A"/>
-                </a:solidFill>
-                <a:latin typeface="Yu Gothic UI" pitchFamily="34" charset="0"/>
-                <a:ea typeface="Yu Gothic UI" pitchFamily="34" charset="-122"/>
-                <a:cs typeface="Yu Gothic UI" pitchFamily="34" charset="-120"/>
-              </a:rPr>
-              <a:t>以下は うちの代理店が扱う各社の引受判定マスタ表(CSV)です。</a:t>
+              <a:t>「あなたは保険代理店の "引受判定サポートAI" です。</a:t>
+            </a:r>
+            <a:endParaRPr lang="en-US" sz="1400" dirty="0"/>
+          </a:p>
+          <a:p>
+            <a:pPr indent="0" marL="0">
+              <a:spcAft>
+                <a:spcPts val="400"/>
+              </a:spcAft>
+              <a:buNone/>
+            </a:pPr>
+            <a:r>
+              <a:rPr lang="en-US" sz="1400" dirty="0">
+                <a:solidFill>
+                  <a:srgbClr val="1A1A1A"/>
+                </a:solidFill>
+                <a:latin typeface="Yu Gothic UI" pitchFamily="34" charset="0"/>
+                <a:ea typeface="Yu Gothic UI" pitchFamily="34" charset="-122"/>
+                <a:cs typeface="Yu Gothic UI" pitchFamily="34" charset="-120"/>
+              </a:rPr>
+              <a:t>以下は うちの代理店が扱う 商品ごとの引受判定マスタ表(CSV)です。</a:t>
             </a:r>
             <a:endParaRPr lang="en-US" sz="1400" dirty="0"/>
           </a:p>
@@ -2314,27 +2314,47 @@
                 <a:ea typeface="Yu Gothic UI" pitchFamily="34" charset="-122"/>
                 <a:cs typeface="Yu Gothic UI" pitchFamily="34" charset="-120"/>
               </a:rPr>
-              <a:t>これをルールとして、次の顧客について "どの会社の どの商品なら通りそうか" を判定してください。</a:t>
-            </a:r>
-            <a:endParaRPr lang="en-US" sz="1400" dirty="0"/>
-          </a:p>
-          <a:p>
-            <a:pPr indent="0" marL="0">
-              <a:spcAft>
-                <a:spcPts val="400"/>
-              </a:spcAft>
-              <a:buNone/>
-            </a:pPr>
-            <a:r>
-              <a:rPr lang="en-US" sz="1400" dirty="0">
-                <a:solidFill>
-                  <a:srgbClr val="1A1A1A"/>
-                </a:solidFill>
-                <a:latin typeface="Yu Gothic UI" pitchFamily="34" charset="0"/>
-                <a:ea typeface="Yu Gothic UI" pitchFamily="34" charset="-122"/>
-                <a:cs typeface="Yu Gothic UI" pitchFamily="34" charset="-120"/>
-              </a:rPr>
-              <a:t>- 顧客: 45歳男性 / 高血圧治療中(1年経過、収縮期185mmHg) / 医療保険希望</a:t>
+              <a:t>これをルールとして、次の顧客が指定した商品に申し込む場合、通るかを判定してください。</a:t>
+            </a:r>
+            <a:endParaRPr lang="en-US" sz="1400" dirty="0"/>
+          </a:p>
+          <a:p>
+            <a:pPr indent="0" marL="0">
+              <a:spcAft>
+                <a:spcPts val="400"/>
+              </a:spcAft>
+              <a:buNone/>
+            </a:pPr>
+            <a:r>
+              <a:rPr lang="en-US" sz="1400" dirty="0">
+                <a:solidFill>
+                  <a:srgbClr val="1A1A1A"/>
+                </a:solidFill>
+                <a:latin typeface="Yu Gothic UI" pitchFamily="34" charset="0"/>
+                <a:ea typeface="Yu Gothic UI" pitchFamily="34" charset="-122"/>
+                <a:cs typeface="Yu Gothic UI" pitchFamily="34" charset="-120"/>
+              </a:rPr>
+              <a:t>- 顧客: 45歳男性 / 高血圧治療中(1年経過、収縮期185mmHg)</a:t>
+            </a:r>
+            <a:endParaRPr lang="en-US" sz="1400" dirty="0"/>
+          </a:p>
+          <a:p>
+            <a:pPr indent="0" marL="0">
+              <a:spcAft>
+                <a:spcPts val="400"/>
+              </a:spcAft>
+              <a:buNone/>
+            </a:pPr>
+            <a:r>
+              <a:rPr lang="en-US" sz="1400" dirty="0">
+                <a:solidFill>
+                  <a:srgbClr val="1A1A1A"/>
+                </a:solidFill>
+                <a:latin typeface="Yu Gothic UI" pitchFamily="34" charset="0"/>
+                <a:ea typeface="Yu Gothic UI" pitchFamily="34" charset="-122"/>
+                <a:cs typeface="Yu Gothic UI" pitchFamily="34" charset="-120"/>
+              </a:rPr>
+              <a:t>- 検討中の商品: A社医療プレミアム</a:t>
             </a:r>
             <a:endParaRPr lang="en-US" sz="1400" dirty="0"/>
           </a:p>
@@ -2383,156 +2403,205 @@
                 <a:ea typeface="Yu Gothic UI" pitchFamily="34" charset="-122"/>
                 <a:cs typeface="Yu Gothic UI" pitchFamily="34" charset="-120"/>
               </a:rPr>
-              <a:t>- 検討した条件: (どの条件詳細に該当するか)</a:t>
-            </a:r>
-            <a:endParaRPr lang="en-US" sz="1400" dirty="0"/>
-          </a:p>
-          <a:p>
-            <a:pPr indent="0" marL="0">
-              <a:spcAft>
-                <a:spcPts val="400"/>
-              </a:spcAft>
-              <a:buNone/>
-            </a:pPr>
-            <a:r>
-              <a:rPr lang="en-US" sz="1400" dirty="0">
-                <a:solidFill>
-                  <a:srgbClr val="1A1A1A"/>
-                </a:solidFill>
-                <a:latin typeface="Yu Gothic UI" pitchFamily="34" charset="0"/>
-                <a:ea typeface="Yu Gothic UI" pitchFamily="34" charset="-122"/>
-                <a:cs typeface="Yu Gothic UI" pitchFamily="34" charset="-120"/>
-              </a:rPr>
-              <a:t>- 通りそうな会社(YES): 会社名 + 商品ジャンル + 条件ID</a:t>
-            </a:r>
-            <a:endParaRPr lang="en-US" sz="1400" dirty="0"/>
-          </a:p>
-          <a:p>
-            <a:pPr indent="0" marL="0">
-              <a:spcAft>
-                <a:spcPts val="400"/>
-              </a:spcAft>
-              <a:buNone/>
-            </a:pPr>
-            <a:r>
-              <a:rPr lang="en-US" sz="1400" dirty="0">
-                <a:solidFill>
-                  <a:srgbClr val="1A1A1A"/>
-                </a:solidFill>
-                <a:latin typeface="Yu Gothic UI" pitchFamily="34" charset="0"/>
-                <a:ea typeface="Yu Gothic UI" pitchFamily="34" charset="-122"/>
-                <a:cs typeface="Yu Gothic UI" pitchFamily="34" charset="-120"/>
-              </a:rPr>
-              <a:t>- 要確認で相談推奨: 会社名 + 商品ジャンル + 条件ID + どんな追加確認が必要か</a:t>
-            </a:r>
-            <a:endParaRPr lang="en-US" sz="1400" dirty="0"/>
-          </a:p>
-          <a:p>
-            <a:pPr indent="0" marL="0">
-              <a:spcAft>
-                <a:spcPts val="400"/>
-              </a:spcAft>
-              <a:buNone/>
-            </a:pPr>
-            <a:r>
-              <a:rPr lang="en-US" sz="1400" dirty="0">
-                <a:solidFill>
-                  <a:srgbClr val="1A1A1A"/>
-                </a:solidFill>
-                <a:latin typeface="Yu Gothic UI" pitchFamily="34" charset="0"/>
-                <a:ea typeface="Yu Gothic UI" pitchFamily="34" charset="-122"/>
-                <a:cs typeface="Yu Gothic UI" pitchFamily="34" charset="-120"/>
-              </a:rPr>
-              <a:t>- 引受不可(NG): 会社名 + 商品ジャンル + 条件ID</a:t>
-            </a:r>
-            <a:endParaRPr lang="en-US" sz="1400" dirty="0"/>
-          </a:p>
-          <a:p>
-            <a:pPr indent="0" marL="0">
-              <a:spcAft>
-                <a:spcPts val="400"/>
-              </a:spcAft>
-              <a:buNone/>
-            </a:pPr>
-            <a:r>
-              <a:rPr lang="en-US" sz="1400" dirty="0">
-                <a:solidFill>
-                  <a:srgbClr val="1A1A1A"/>
-                </a:solidFill>
-                <a:latin typeface="Yu Gothic UI" pitchFamily="34" charset="0"/>
-                <a:ea typeface="Yu Gothic UI" pitchFamily="34" charset="-122"/>
-                <a:cs typeface="Yu Gothic UI" pitchFamily="34" charset="-120"/>
-              </a:rPr>
-              <a:t>- 代替提案: (該当がない場合、緩和型など次の一手)</a:t>
-            </a:r>
-            <a:endParaRPr lang="en-US" sz="1400" dirty="0"/>
-          </a:p>
-          <a:p>
-            <a:pPr indent="0" marL="0">
-              <a:spcAft>
-                <a:spcPts val="400"/>
-              </a:spcAft>
-              <a:buNone/>
-            </a:pPr>
-            <a:r>
-              <a:rPr lang="en-US" sz="1400" dirty="0">
-                <a:solidFill>
-                  <a:srgbClr val="1A1A1A"/>
-                </a:solidFill>
-                <a:latin typeface="Yu Gothic UI" pitchFamily="34" charset="0"/>
-                <a:ea typeface="Yu Gothic UI" pitchFamily="34" charset="-122"/>
-                <a:cs typeface="Yu Gothic UI" pitchFamily="34" charset="-120"/>
-              </a:rPr>
-              <a:t>- 次のアクション: どの会社の営業担当に事前相談すべきか</a:t>
-            </a:r>
-            <a:endParaRPr lang="en-US" sz="1400" dirty="0"/>
-          </a:p>
-          <a:p>
-            <a:pPr indent="0" marL="0">
-              <a:spcAft>
-                <a:spcPts val="400"/>
-              </a:spcAft>
-              <a:buNone/>
-            </a:pPr>
-            <a:endParaRPr lang="en-US" sz="1400" dirty="0"/>
-          </a:p>
-          <a:p>
-            <a:pPr indent="0" marL="0">
-              <a:spcAft>
-                <a:spcPts val="400"/>
-              </a:spcAft>
-              <a:buNone/>
-            </a:pPr>
-            <a:r>
-              <a:rPr lang="en-US" sz="1400" dirty="0">
-                <a:solidFill>
-                  <a:srgbClr val="1A1A1A"/>
-                </a:solidFill>
-                <a:latin typeface="Yu Gothic UI" pitchFamily="34" charset="0"/>
-                <a:ea typeface="Yu Gothic UI" pitchFamily="34" charset="-122"/>
-                <a:cs typeface="Yu Gothic UI" pitchFamily="34" charset="-120"/>
-              </a:rPr>
-              <a:t>該当ルールがない場合は "該当なし → 各社支社に事前相談要" と返してください。</a:t>
-            </a:r>
-            <a:endParaRPr lang="en-US" sz="1400" dirty="0"/>
-          </a:p>
-          <a:p>
-            <a:pPr indent="0" marL="0">
-              <a:spcAft>
-                <a:spcPts val="400"/>
-              </a:spcAft>
-              <a:buNone/>
-            </a:pPr>
-            <a:r>
-              <a:rPr lang="en-US" sz="1400" dirty="0">
-                <a:solidFill>
-                  <a:srgbClr val="1A1A1A"/>
-                </a:solidFill>
-                <a:latin typeface="Yu Gothic UI" pitchFamily="34" charset="0"/>
-                <a:ea typeface="Yu Gothic UI" pitchFamily="34" charset="-122"/>
-                <a:cs typeface="Yu Gothic UI" pitchFamily="34" charset="-120"/>
-              </a:rPr>
-              <a:t>最終判定は各保険会社が行います。」</a:t>
+              <a:t>- この商品での判定: YES / 要確認 / NO</a:t>
+            </a:r>
+            <a:endParaRPr lang="en-US" sz="1400" dirty="0"/>
+          </a:p>
+          <a:p>
+            <a:pPr indent="0" marL="0">
+              <a:spcAft>
+                <a:spcPts val="400"/>
+              </a:spcAft>
+              <a:buNone/>
+            </a:pPr>
+            <a:r>
+              <a:rPr lang="en-US" sz="1400" dirty="0">
+                <a:solidFill>
+                  <a:srgbClr val="1A1A1A"/>
+                </a:solidFill>
+                <a:latin typeface="Yu Gothic UI" pitchFamily="34" charset="0"/>
+                <a:ea typeface="Yu Gothic UI" pitchFamily="34" charset="-122"/>
+                <a:cs typeface="Yu Gothic UI" pitchFamily="34" charset="-120"/>
+              </a:rPr>
+              <a:t>- 該当した条件ID: RULE-XXX</a:t>
+            </a:r>
+            <a:endParaRPr lang="en-US" sz="1400" dirty="0"/>
+          </a:p>
+          <a:p>
+            <a:pPr indent="0" marL="0">
+              <a:spcAft>
+                <a:spcPts val="400"/>
+              </a:spcAft>
+              <a:buNone/>
+            </a:pPr>
+            <a:r>
+              <a:rPr lang="en-US" sz="1400" dirty="0">
+                <a:solidFill>
+                  <a:srgbClr val="1A1A1A"/>
+                </a:solidFill>
+                <a:latin typeface="Yu Gothic UI" pitchFamily="34" charset="0"/>
+                <a:ea typeface="Yu Gothic UI" pitchFamily="34" charset="-122"/>
+                <a:cs typeface="Yu Gothic UI" pitchFamily="34" charset="-120"/>
+              </a:rPr>
+              <a:t>- 判定理由: 1〜2文</a:t>
+            </a:r>
+            <a:endParaRPr lang="en-US" sz="1400" dirty="0"/>
+          </a:p>
+          <a:p>
+            <a:pPr indent="0" marL="0">
+              <a:spcAft>
+                <a:spcPts val="400"/>
+              </a:spcAft>
+              <a:buNone/>
+            </a:pPr>
+            <a:r>
+              <a:rPr lang="en-US" sz="1400" dirty="0">
+                <a:solidFill>
+                  <a:srgbClr val="1A1A1A"/>
+                </a:solidFill>
+                <a:latin typeface="Yu Gothic UI" pitchFamily="34" charset="0"/>
+                <a:ea typeface="Yu Gothic UI" pitchFamily="34" charset="-122"/>
+                <a:cs typeface="Yu Gothic UI" pitchFamily="34" charset="-120"/>
+              </a:rPr>
+              <a:t>- 対応: 再申込タイミング / 代替商品案内 / 追加確認事項</a:t>
+            </a:r>
+            <a:endParaRPr lang="en-US" sz="1400" dirty="0"/>
+          </a:p>
+          <a:p>
+            <a:pPr indent="0" marL="0">
+              <a:spcAft>
+                <a:spcPts val="400"/>
+              </a:spcAft>
+              <a:buNone/>
+            </a:pPr>
+            <a:r>
+              <a:rPr lang="en-US" sz="1400" dirty="0">
+                <a:solidFill>
+                  <a:srgbClr val="1A1A1A"/>
+                </a:solidFill>
+                <a:latin typeface="Yu Gothic UI" pitchFamily="34" charset="0"/>
+                <a:ea typeface="Yu Gothic UI" pitchFamily="34" charset="-122"/>
+                <a:cs typeface="Yu Gothic UI" pitchFamily="34" charset="-120"/>
+              </a:rPr>
+              <a:t>- 次のアクション: 誰に確認するか、顧客に何を伝えるか</a:t>
+            </a:r>
+            <a:endParaRPr lang="en-US" sz="1400" dirty="0"/>
+          </a:p>
+          <a:p>
+            <a:pPr indent="0" marL="0">
+              <a:spcAft>
+                <a:spcPts val="400"/>
+              </a:spcAft>
+              <a:buNone/>
+            </a:pPr>
+            <a:endParaRPr lang="en-US" sz="1400" dirty="0"/>
+          </a:p>
+          <a:p>
+            <a:pPr indent="0" marL="0">
+              <a:spcAft>
+                <a:spcPts val="400"/>
+              </a:spcAft>
+              <a:buNone/>
+            </a:pPr>
+            <a:r>
+              <a:rPr lang="en-US" sz="1400" dirty="0">
+                <a:solidFill>
+                  <a:srgbClr val="1A1A1A"/>
+                </a:solidFill>
+                <a:latin typeface="Yu Gothic UI" pitchFamily="34" charset="0"/>
+                <a:ea typeface="Yu Gothic UI" pitchFamily="34" charset="-122"/>
+                <a:cs typeface="Yu Gothic UI" pitchFamily="34" charset="-120"/>
+              </a:rPr>
+              <a:t>該当ルールがない場合は "該当なし → 商品担当に事前確認要" と返してください。</a:t>
+            </a:r>
+            <a:endParaRPr lang="en-US" sz="1400" dirty="0"/>
+          </a:p>
+          <a:p>
+            <a:pPr indent="0" marL="0">
+              <a:spcAft>
+                <a:spcPts val="400"/>
+              </a:spcAft>
+              <a:buNone/>
+            </a:pPr>
+            <a:r>
+              <a:rPr lang="en-US" sz="1400" dirty="0">
+                <a:solidFill>
+                  <a:srgbClr val="1A1A1A"/>
+                </a:solidFill>
+                <a:latin typeface="Yu Gothic UI" pitchFamily="34" charset="0"/>
+                <a:ea typeface="Yu Gothic UI" pitchFamily="34" charset="-122"/>
+                <a:cs typeface="Yu Gothic UI" pitchFamily="34" charset="-120"/>
+              </a:rPr>
+              <a:t>最終判定は保険会社が行います。」</a:t>
+            </a:r>
+            <a:endParaRPr lang="en-US" sz="1400" dirty="0"/>
+          </a:p>
+          <a:p>
+            <a:pPr indent="0" marL="0">
+              <a:spcAft>
+                <a:spcPts val="400"/>
+              </a:spcAft>
+              <a:buNone/>
+            </a:pPr>
+            <a:endParaRPr lang="en-US" sz="1400" dirty="0"/>
+          </a:p>
+          <a:p>
+            <a:pPr indent="0" marL="0">
+              <a:spcAft>
+                <a:spcPts val="400"/>
+              </a:spcAft>
+              <a:buNone/>
+            </a:pPr>
+            <a:r>
+              <a:rPr lang="en-US" sz="1400" dirty="0">
+                <a:solidFill>
+                  <a:srgbClr val="1A1A1A"/>
+                </a:solidFill>
+                <a:latin typeface="Yu Gothic UI" pitchFamily="34" charset="0"/>
+                <a:ea typeface="Yu Gothic UI" pitchFamily="34" charset="-122"/>
+                <a:cs typeface="Yu Gothic UI" pitchFamily="34" charset="-120"/>
+              </a:rPr>
+              <a:t>【別商品での再判定テスト】</a:t>
+            </a:r>
+            <a:endParaRPr lang="en-US" sz="1400" dirty="0"/>
+          </a:p>
+          <a:p>
+            <a:pPr indent="0" marL="0">
+              <a:spcAft>
+                <a:spcPts val="400"/>
+              </a:spcAft>
+              <a:buNone/>
+            </a:pPr>
+            <a:r>
+              <a:rPr lang="en-US" sz="1400" dirty="0">
+                <a:solidFill>
+                  <a:srgbClr val="1A1A1A"/>
+                </a:solidFill>
+                <a:latin typeface="Yu Gothic UI" pitchFamily="34" charset="0"/>
+                <a:ea typeface="Yu Gothic UI" pitchFamily="34" charset="-122"/>
+                <a:cs typeface="Yu Gothic UI" pitchFamily="34" charset="-120"/>
+              </a:rPr>
+              <a:t>同じ顧客(45歳男性、高血圧185mmHg)で、検討商品を「D社医療ライト」に変えて再判定させる。</a:t>
+            </a:r>
+            <a:endParaRPr lang="en-US" sz="1400" dirty="0"/>
+          </a:p>
+          <a:p>
+            <a:pPr indent="0" marL="0">
+              <a:spcAft>
+                <a:spcPts val="400"/>
+              </a:spcAft>
+              <a:buNone/>
+            </a:pPr>
+            <a:r>
+              <a:rPr lang="en-US" sz="1400" dirty="0">
+                <a:solidFill>
+                  <a:srgbClr val="1A1A1A"/>
+                </a:solidFill>
+                <a:latin typeface="Yu Gothic UI" pitchFamily="34" charset="0"/>
+                <a:ea typeface="Yu Gothic UI" pitchFamily="34" charset="-122"/>
+                <a:cs typeface="Yu Gothic UI" pitchFamily="34" charset="-120"/>
+              </a:rPr>
+              <a:t>緩和型商品なので 3項目告知に該当なしなら YES が返ることを確認。</a:t>
             </a:r>
             <a:endParaRPr lang="en-US" sz="1400" dirty="0"/>
           </a:p>
@@ -2581,7 +2650,7 @@
                 <a:ea typeface="Yu Gothic UI" pitchFamily="34" charset="-122"/>
                 <a:cs typeface="Yu Gothic UI" pitchFamily="34" charset="-120"/>
               </a:rPr>
-              <a:t>「顧客: 30歳男性 / パラグライダー競技選手 / 死亡保険」を投げて "該当なし → 各社支社に事前相談要" が返るか確認。</a:t>
+              <a:t>「顧客: 30歳男性 / パラグライダー競技選手 / 検討中の商品: A社死亡プレミアム」を投げて "該当なし → 商品担当に事前確認要" が返るか確認。</a:t>
             </a:r>
             <a:endParaRPr lang="en-US" sz="1400" dirty="0"/>
           </a:p>
@@ -2709,87 +2778,107 @@
                 <a:ea typeface="Yu Gothic UI" pitchFamily="34" charset="-122"/>
                 <a:cs typeface="Yu Gothic UI" pitchFamily="34" charset="-120"/>
               </a:rPr>
-              <a:t>・3件の顧客について 会社別の一次判定 が動く</a:t>
-            </a:r>
-            <a:endParaRPr lang="en-US" sz="1400" dirty="0"/>
-          </a:p>
-          <a:p>
-            <a:pPr indent="0" marL="0">
-              <a:spcAft>
-                <a:spcPts val="400"/>
-              </a:spcAft>
-              <a:buNone/>
-            </a:pPr>
-            <a:r>
-              <a:rPr lang="en-US" sz="1400" dirty="0">
-                <a:solidFill>
-                  <a:srgbClr val="1A1A1A"/>
-                </a:solidFill>
-                <a:latin typeface="Yu Gothic UI" pitchFamily="34" charset="0"/>
-                <a:ea typeface="Yu Gothic UI" pitchFamily="34" charset="-122"/>
-                <a:cs typeface="Yu Gothic UI" pitchFamily="34" charset="-120"/>
-              </a:rPr>
-              <a:t>・全ての判定に "参照条件ID" と "会社名" が付いている</a:t>
-            </a:r>
-            <a:endParaRPr lang="en-US" sz="1400" dirty="0"/>
-          </a:p>
-          <a:p>
-            <a:pPr indent="0" marL="0">
-              <a:spcAft>
-                <a:spcPts val="400"/>
-              </a:spcAft>
-              <a:buNone/>
-            </a:pPr>
-            <a:r>
-              <a:rPr lang="en-US" sz="1400" dirty="0">
-                <a:solidFill>
-                  <a:srgbClr val="1A1A1A"/>
-                </a:solidFill>
-                <a:latin typeface="Yu Gothic UI" pitchFamily="34" charset="0"/>
-                <a:ea typeface="Yu Gothic UI" pitchFamily="34" charset="-122"/>
-                <a:cs typeface="Yu Gothic UI" pitchFamily="34" charset="-120"/>
-              </a:rPr>
-              <a:t>・NG会社の代替として "代替: 〇社なら通る可能性" が出る</a:t>
-            </a:r>
-            <a:endParaRPr lang="en-US" sz="1400" dirty="0"/>
-          </a:p>
-          <a:p>
-            <a:pPr indent="0" marL="0">
-              <a:spcAft>
-                <a:spcPts val="400"/>
-              </a:spcAft>
-              <a:buNone/>
-            </a:pPr>
-            <a:r>
-              <a:rPr lang="en-US" sz="1400" dirty="0">
-                <a:solidFill>
-                  <a:srgbClr val="1A1A1A"/>
-                </a:solidFill>
-                <a:latin typeface="Yu Gothic UI" pitchFamily="34" charset="0"/>
-                <a:ea typeface="Yu Gothic UI" pitchFamily="34" charset="-122"/>
-                <a:cs typeface="Yu Gothic UI" pitchFamily="34" charset="-120"/>
-              </a:rPr>
-              <a:t>・該当なしテストで "自動 YES" にならず "各社支社に事前相談要" になる</a:t>
-            </a:r>
-            <a:endParaRPr lang="en-US" sz="1400" dirty="0"/>
-          </a:p>
-          <a:p>
-            <a:pPr indent="0" marL="0">
-              <a:spcAft>
-                <a:spcPts val="400"/>
-              </a:spcAft>
-              <a:buNone/>
-            </a:pPr>
-            <a:r>
-              <a:rPr lang="en-US" sz="1400" dirty="0">
-                <a:solidFill>
-                  <a:srgbClr val="1A1A1A"/>
-                </a:solidFill>
-                <a:latin typeface="Yu Gothic UI" pitchFamily="34" charset="0"/>
-                <a:ea typeface="Yu Gothic UI" pitchFamily="34" charset="-122"/>
-                <a:cs typeface="Yu Gothic UI" pitchFamily="34" charset="-120"/>
-              </a:rPr>
-              <a:t>・更新ログシートに 2件のダミー更新(各社の改定情報反映)が入っている</a:t>
+              <a:t>・3件の顧客+商品 で判定が動く</a:t>
+            </a:r>
+            <a:endParaRPr lang="en-US" sz="1400" dirty="0"/>
+          </a:p>
+          <a:p>
+            <a:pPr indent="0" marL="0">
+              <a:spcAft>
+                <a:spcPts val="400"/>
+              </a:spcAft>
+              <a:buNone/>
+            </a:pPr>
+            <a:r>
+              <a:rPr lang="en-US" sz="1400" dirty="0">
+                <a:solidFill>
+                  <a:srgbClr val="1A1A1A"/>
+                </a:solidFill>
+                <a:latin typeface="Yu Gothic UI" pitchFamily="34" charset="0"/>
+                <a:ea typeface="Yu Gothic UI" pitchFamily="34" charset="-122"/>
+                <a:cs typeface="Yu Gothic UI" pitchFamily="34" charset="-120"/>
+              </a:rPr>
+              <a:t>・全ての判定に "該当した条件ID" が付いている</a:t>
+            </a:r>
+            <a:endParaRPr lang="en-US" sz="1400" dirty="0"/>
+          </a:p>
+          <a:p>
+            <a:pPr indent="0" marL="0">
+              <a:spcAft>
+                <a:spcPts val="400"/>
+              </a:spcAft>
+              <a:buNone/>
+            </a:pPr>
+            <a:r>
+              <a:rPr lang="en-US" sz="1400" dirty="0">
+                <a:solidFill>
+                  <a:srgbClr val="1A1A1A"/>
+                </a:solidFill>
+                <a:latin typeface="Yu Gothic UI" pitchFamily="34" charset="0"/>
+                <a:ea typeface="Yu Gothic UI" pitchFamily="34" charset="-122"/>
+                <a:cs typeface="Yu Gothic UI" pitchFamily="34" charset="-120"/>
+              </a:rPr>
+              <a:t>・同じ顧客で商品を切り替えたら 別の商品ルールで判定される</a:t>
+            </a:r>
+            <a:endParaRPr lang="en-US" sz="1400" dirty="0"/>
+          </a:p>
+          <a:p>
+            <a:pPr indent="0" marL="0">
+              <a:spcAft>
+                <a:spcPts val="400"/>
+              </a:spcAft>
+              <a:buNone/>
+            </a:pPr>
+            <a:r>
+              <a:rPr lang="en-US" sz="1400" dirty="0">
+                <a:solidFill>
+                  <a:srgbClr val="1A1A1A"/>
+                </a:solidFill>
+                <a:latin typeface="Yu Gothic UI" pitchFamily="34" charset="0"/>
+                <a:ea typeface="Yu Gothic UI" pitchFamily="34" charset="-122"/>
+                <a:cs typeface="Yu Gothic UI" pitchFamily="34" charset="-120"/>
+              </a:rPr>
+              <a:t>・NG判定の "対応" に 顧客説明・代替商品・再申込タイミング が出る</a:t>
+            </a:r>
+            <a:endParaRPr lang="en-US" sz="1400" dirty="0"/>
+          </a:p>
+          <a:p>
+            <a:pPr indent="0" marL="0">
+              <a:spcAft>
+                <a:spcPts val="400"/>
+              </a:spcAft>
+              <a:buNone/>
+            </a:pPr>
+            <a:r>
+              <a:rPr lang="en-US" sz="1400" dirty="0">
+                <a:solidFill>
+                  <a:srgbClr val="1A1A1A"/>
+                </a:solidFill>
+                <a:latin typeface="Yu Gothic UI" pitchFamily="34" charset="0"/>
+                <a:ea typeface="Yu Gothic UI" pitchFamily="34" charset="-122"/>
+                <a:cs typeface="Yu Gothic UI" pitchFamily="34" charset="-120"/>
+              </a:rPr>
+              <a:t>・該当なしテストで "自動 YES" にならず "商品担当に事前確認要" になる</a:t>
+            </a:r>
+            <a:endParaRPr lang="en-US" sz="1400" dirty="0"/>
+          </a:p>
+          <a:p>
+            <a:pPr indent="0" marL="0">
+              <a:spcAft>
+                <a:spcPts val="400"/>
+              </a:spcAft>
+              <a:buNone/>
+            </a:pPr>
+            <a:r>
+              <a:rPr lang="en-US" sz="1400" dirty="0">
+                <a:solidFill>
+                  <a:srgbClr val="1A1A1A"/>
+                </a:solidFill>
+                <a:latin typeface="Yu Gothic UI" pitchFamily="34" charset="0"/>
+                <a:ea typeface="Yu Gothic UI" pitchFamily="34" charset="-122"/>
+                <a:cs typeface="Yu Gothic UI" pitchFamily="34" charset="-120"/>
+              </a:rPr>
+              <a:t>・更新ログシートに 2件のダミー更新(各商品の改定情報反映)が入っている</a:t>
             </a:r>
             <a:endParaRPr lang="en-US" sz="1400" dirty="0"/>
           </a:p>
@@ -2937,47 +3026,47 @@
                 <a:ea typeface="Yu Gothic UI" pitchFamily="34" charset="-122"/>
                 <a:cs typeface="Yu Gothic UI" pitchFamily="34" charset="-120"/>
               </a:rPr>
-              <a:t>・「該当なし = YES」に AI がしないよう、"該当なし = 各社支社に事前相談要" を必ずプロンプトに書かせる。</a:t>
-            </a:r>
-            <a:endParaRPr lang="en-US" sz="1400" dirty="0"/>
-          </a:p>
-          <a:p>
-            <a:pPr indent="0" marL="0">
-              <a:spcAft>
-                <a:spcPts val="400"/>
-              </a:spcAft>
-              <a:buNone/>
-            </a:pPr>
-            <a:r>
-              <a:rPr lang="en-US" sz="1400" dirty="0">
-                <a:solidFill>
-                  <a:srgbClr val="1A1A1A"/>
-                </a:solidFill>
-                <a:latin typeface="Yu Gothic UI" pitchFamily="34" charset="0"/>
-                <a:ea typeface="Yu Gothic UI" pitchFamily="34" charset="-122"/>
-                <a:cs typeface="Yu Gothic UI" pitchFamily="34" charset="-120"/>
-              </a:rPr>
-              <a:t>・出力には 必ず "会社名 + 条件ID" を含めさせる。後で "なぜこの見立て?" の監査ができる。</a:t>
-            </a:r>
-            <a:endParaRPr lang="en-US" sz="1400" dirty="0"/>
-          </a:p>
-          <a:p>
-            <a:pPr indent="0" marL="0">
-              <a:spcAft>
-                <a:spcPts val="400"/>
-              </a:spcAft>
-              <a:buNone/>
-            </a:pPr>
-            <a:r>
-              <a:rPr lang="en-US" sz="1400" dirty="0">
-                <a:solidFill>
-                  <a:srgbClr val="1A1A1A"/>
-                </a:solidFill>
-                <a:latin typeface="Yu Gothic UI" pitchFamily="34" charset="0"/>
-                <a:ea typeface="Yu Gothic UI" pitchFamily="34" charset="-122"/>
-                <a:cs typeface="Yu Gothic UI" pitchFamily="34" charset="-120"/>
-              </a:rPr>
-              <a:t>・「NG会社しか出ない場合の代替提案」を必ず出させる。それが代理店の付加価値。</a:t>
+              <a:t>・「該当なし = YES」に AI がしないよう、"該当なし = 商品担当に事前確認要" を必ずプロンプトに書かせる。</a:t>
+            </a:r>
+            <a:endParaRPr lang="en-US" sz="1400" dirty="0"/>
+          </a:p>
+          <a:p>
+            <a:pPr indent="0" marL="0">
+              <a:spcAft>
+                <a:spcPts val="400"/>
+              </a:spcAft>
+              <a:buNone/>
+            </a:pPr>
+            <a:r>
+              <a:rPr lang="en-US" sz="1400" dirty="0">
+                <a:solidFill>
+                  <a:srgbClr val="1A1A1A"/>
+                </a:solidFill>
+                <a:latin typeface="Yu Gothic UI" pitchFamily="34" charset="0"/>
+                <a:ea typeface="Yu Gothic UI" pitchFamily="34" charset="-122"/>
+                <a:cs typeface="Yu Gothic UI" pitchFamily="34" charset="-120"/>
+              </a:rPr>
+              <a:t>・出力には 必ず "該当した条件ID" を含めさせる。後で "なぜこの判定?" の監査ができる。</a:t>
+            </a:r>
+            <a:endParaRPr lang="en-US" sz="1400" dirty="0"/>
+          </a:p>
+          <a:p>
+            <a:pPr indent="0" marL="0">
+              <a:spcAft>
+                <a:spcPts val="400"/>
+              </a:spcAft>
+              <a:buNone/>
+            </a:pPr>
+            <a:r>
+              <a:rPr lang="en-US" sz="1400" dirty="0">
+                <a:solidFill>
+                  <a:srgbClr val="1A1A1A"/>
+                </a:solidFill>
+                <a:latin typeface="Yu Gothic UI" pitchFamily="34" charset="0"/>
+                <a:ea typeface="Yu Gothic UI" pitchFamily="34" charset="-122"/>
+                <a:cs typeface="Yu Gothic UI" pitchFamily="34" charset="-120"/>
+              </a:rPr>
+              <a:t>・NG判定で終わらせず「対応」まで出させる。顧客説明・代替商品・再申込タイミングが代理店の付加価値。</a:t>
             </a:r>
             <a:endParaRPr lang="en-US" sz="1400" dirty="0"/>
           </a:p>
@@ -3017,7 +3106,7 @@
                 <a:ea typeface="Yu Gothic UI" pitchFamily="34" charset="-122"/>
                 <a:cs typeface="Yu Gothic UI" pitchFamily="34" charset="-120"/>
               </a:rPr>
-              <a:t>・月1回15分の見直しでも十分。「田中さんが毎月第1金曜に各社営業担当へ一斉ヒアリング」など具体的に決めさせる。</a:t>
+              <a:t>・月1回15分の見直しでも十分。「田中さんが毎月第1金曜に各商品担当へヒアリング」など具体的に決めさせる。</a:t>
             </a:r>
             <a:endParaRPr lang="en-US" sz="1400" dirty="0"/>
           </a:p>
